--- a/Apresentacao_Projeto_Final.pptx
+++ b/Apresentacao_Projeto_Final.pptx
@@ -13,6 +13,7 @@
     <p:sldId id="261" r:id="rId12"/>
     <p:sldId id="262" r:id="rId13"/>
     <p:sldId id="263" r:id="rId14"/>
+    <p:sldId id="264" r:id="rId15"/>
   </p:sldIdLst>
   <p:sldSz cx="12188952" cy="6858000" type="screen4x3"/>
   <p:notesSz cx="6858000" cy="9144000"/>
@@ -3111,8 +3112,8 @@
         </p:nvSpPr>
         <p:spPr>
           <a:xfrm>
-            <a:off x="0" y="3017520"/>
-            <a:ext cx="12188952" cy="73152"/>
+            <a:off x="0" y="3246120"/>
+            <a:ext cx="12188952" cy="54864"/>
           </a:xfrm>
           <a:prstGeom prst="rect">
             <a:avLst/>
@@ -3154,8 +3155,8 @@
         </p:nvSpPr>
         <p:spPr>
           <a:xfrm>
-            <a:off x="457200" y="731520"/>
-            <a:ext cx="10972800" cy="1097280"/>
+            <a:off x="548640" y="457200"/>
+            <a:ext cx="10972800" cy="822960"/>
           </a:xfrm>
           <a:prstGeom prst="rect">
             <a:avLst/>
@@ -3170,12 +3171,12 @@
           <a:p>
             <a:pPr algn="ctr"/>
             <a:r>
-              <a:rPr sz="4800" b="1">
+              <a:rPr sz="4600" b="1">
                 <a:solidFill>
                   <a:srgbClr val="00B4D8"/>
                 </a:solidFill>
               </a:rPr>
-              <a:t>Classificador de Saude Fetal</a:t>
+              <a:t>Classificador de Saude Fetal com CTG</a:t>
             </a:r>
           </a:p>
         </p:txBody>
@@ -3188,8 +3189,8 @@
         </p:nvSpPr>
         <p:spPr>
           <a:xfrm>
-            <a:off x="457200" y="1920240"/>
-            <a:ext cx="10972800" cy="640080"/>
+            <a:off x="548640" y="1417320"/>
+            <a:ext cx="10972800" cy="548640"/>
           </a:xfrm>
           <a:prstGeom prst="rect">
             <a:avLst/>
@@ -3204,12 +3205,12 @@
           <a:p>
             <a:pPr algn="ctr"/>
             <a:r>
-              <a:rPr sz="2800" b="0">
+              <a:rPr sz="2200" b="0">
                 <a:solidFill>
                   <a:srgbClr val="FFFFFF"/>
                 </a:solidFill>
               </a:rPr>
-              <a:t>Pipeline MLOps End-to-End</a:t>
+              <a:t>Um pipeline completo de Machine Learning — do dado bruto ate o deploy em producao</a:t>
             </a:r>
           </a:p>
         </p:txBody>
@@ -3222,8 +3223,8 @@
         </p:nvSpPr>
         <p:spPr>
           <a:xfrm>
-            <a:off x="457200" y="2651760"/>
-            <a:ext cx="10972800" cy="457200"/>
+            <a:off x="548640" y="2103120"/>
+            <a:ext cx="10972800" cy="411480"/>
           </a:xfrm>
           <a:prstGeom prst="rect">
             <a:avLst/>
@@ -3238,26 +3239,69 @@
           <a:p>
             <a:pPr algn="ctr"/>
             <a:r>
-              <a:rPr sz="1600" b="0">
+              <a:rPr sz="1500" b="0">
                 <a:solidFill>
                   <a:srgbClr val="AABBCC"/>
                 </a:solidFill>
               </a:rPr>
-              <a:t>Supabase · DuckDB · DagsHub · DVC · MLflow · Docker · Render · Streamlit</a:t>
-            </a:r>
-          </a:p>
-        </p:txBody>
-      </p:sp>
-      <p:sp>
-        <p:nvSpPr>
-          <p:cNvPr id="6" name="TextBox 5"/>
+              <a:t>Supabase  ·  DuckDB  ·  DVC  ·  DagsHub  ·  MLflow  ·  Docker  ·  Render  ·  Streamlit</a:t>
+            </a:r>
+          </a:p>
+        </p:txBody>
+      </p:sp>
+      <p:sp>
+        <p:nvSpPr>
+          <p:cNvPr id="6" name="Rectangle 5"/>
+          <p:cNvSpPr/>
+          <p:nvPr/>
+        </p:nvSpPr>
+        <p:spPr>
+          <a:xfrm>
+            <a:off x="0" y="3383280"/>
+            <a:ext cx="12188952" cy="54864"/>
+          </a:xfrm>
+          <a:prstGeom prst="rect">
+            <a:avLst/>
+          </a:prstGeom>
+          <a:solidFill>
+            <a:srgbClr val="00B4D8"/>
+          </a:solidFill>
+          <a:ln>
+            <a:noFill/>
+          </a:ln>
+        </p:spPr>
+        <p:style>
+          <a:lnRef idx="1">
+            <a:schemeClr val="accent1"/>
+          </a:lnRef>
+          <a:fillRef idx="3">
+            <a:schemeClr val="accent1"/>
+          </a:fillRef>
+          <a:effectRef idx="2">
+            <a:schemeClr val="accent1"/>
+          </a:effectRef>
+          <a:fontRef idx="minor">
+            <a:schemeClr val="lt1"/>
+          </a:fontRef>
+        </p:style>
+        <p:txBody>
+          <a:bodyPr rtlCol="0" anchor="ctr"/>
+          <a:lstStyle/>
+          <a:p>
+            <a:pPr algn="ctr"/>
+          </a:p>
+        </p:txBody>
+      </p:sp>
+      <p:sp>
+        <p:nvSpPr>
+          <p:cNvPr id="7" name="TextBox 6"/>
           <p:cNvSpPr txBox="1"/>
           <p:nvPr/>
         </p:nvSpPr>
         <p:spPr>
           <a:xfrm>
-            <a:off x="457200" y="5029200"/>
-            <a:ext cx="10972800" cy="457200"/>
+            <a:off x="548640" y="3840480"/>
+            <a:ext cx="10972800" cy="731520"/>
           </a:xfrm>
           <a:prstGeom prst="rect">
             <a:avLst/>
@@ -3272,9 +3316,45 @@
           <a:p>
             <a:pPr algn="ctr"/>
             <a:r>
-              <a:rPr sz="1400" b="0">
-                <a:solidFill>
-                  <a:srgbClr val="8899AA"/>
+              <a:rPr sz="1500" b="0">
+                <a:solidFill>
+                  <a:srgbClr val="AABBCC"/>
+                </a:solidFill>
+              </a:rPr>
+              <a:t>O que voce vai ver aqui:
+Como eu transformei um CSV do Kaggle em uma aplicacao web real, com modelo em producao,
+versionamento de dados e deploy automatico — usando as mesmas ferramentas do mercado.</a:t>
+            </a:r>
+          </a:p>
+        </p:txBody>
+      </p:sp>
+      <p:sp>
+        <p:nvSpPr>
+          <p:cNvPr id="8" name="TextBox 7"/>
+          <p:cNvSpPr txBox="1"/>
+          <p:nvPr/>
+        </p:nvSpPr>
+        <p:spPr>
+          <a:xfrm>
+            <a:off x="548640" y="6035040"/>
+            <a:ext cx="10972800" cy="457200"/>
+          </a:xfrm>
+          <a:prstGeom prst="rect">
+            <a:avLst/>
+          </a:prstGeom>
+          <a:noFill/>
+        </p:spPr>
+        <p:txBody>
+          <a:bodyPr wrap="square">
+            <a:spAutoFit/>
+          </a:bodyPr>
+          <a:lstStyle/>
+          <a:p>
+            <a:pPr algn="ctr"/>
+            <a:r>
+              <a:rPr sz="1300" b="0">
+                <a:solidFill>
+                  <a:srgbClr val="667788"/>
                 </a:solidFill>
               </a:rPr>
               <a:t>Keven Gomes Pereira  |  2026</a:t>
@@ -3316,8 +3396,8 @@
         </p:nvSpPr>
         <p:spPr>
           <a:xfrm>
-            <a:off x="0" y="164592"/>
-            <a:ext cx="12188952" cy="64008"/>
+            <a:off x="0" y="201168"/>
+            <a:ext cx="12188952" cy="54864"/>
           </a:xfrm>
           <a:prstGeom prst="rect">
             <a:avLst/>
@@ -3360,7 +3440,7 @@
         <p:spPr>
           <a:xfrm>
             <a:off x="457200" y="365760"/>
-            <a:ext cx="10972800" cy="548640"/>
+            <a:ext cx="10972800" cy="502920"/>
           </a:xfrm>
           <a:prstGeom prst="rect">
             <a:avLst/>
@@ -3375,12 +3455,12 @@
           <a:p>
             <a:pPr algn="l"/>
             <a:r>
-              <a:rPr sz="3200" b="1">
+              <a:rPr sz="3000" b="1">
                 <a:solidFill>
                   <a:srgbClr val="00B4D8"/>
                 </a:solidFill>
               </a:rPr>
-              <a:t>Problema &amp; Dataset</a:t>
+              <a:t>O Problema — Por que saude fetal?</a:t>
             </a:r>
           </a:p>
         </p:txBody>
@@ -3393,8 +3473,8 @@
         </p:nvSpPr>
         <p:spPr>
           <a:xfrm>
-            <a:off x="457200" y="1097280"/>
-            <a:ext cx="6858000" cy="5029200"/>
+            <a:off x="457200" y="1051560"/>
+            <a:ext cx="7132320" cy="5303520"/>
           </a:xfrm>
           <a:prstGeom prst="rect">
             <a:avLst/>
@@ -3409,19 +3489,19 @@
           <a:p>
             <a:pPr algn="l"/>
             <a:r>
-              <a:rPr sz="1800" b="0">
+              <a:rPr sz="1600" b="0">
                 <a:solidFill>
                   <a:srgbClr val="FFFFFF"/>
                 </a:solidFill>
               </a:rPr>
               <a:t>O que e CTG?
-Cardiotocografia (CTG) monitora a frequencia cardiaca fetal e contracoes uterinas durante a gestacao.
-Objetivo:
-Classificar automaticamente a saude fetal em 3 categorias para auxiliar medicos na tomada de decisao.
-Dataset (Kaggle):
-• 2.126 exames de CTG
-• 21 features clinicas
-• Target: Normal / Suspect / Pathological</a:t>
+Cardiotocografia (CTG) e um exame feito durante a gestacao que monitora dois sinais ao mesmo tempo:
+   • a frequencia cardiaca do bebe
+   • as contracoes uterinas da mae
+O problema e que interpretar esses sinais nao e trivial. Medicos experientes discordam entre si em ate 25% dos casos.
+A ideia do projeto:
+Usar Machine Learning para ajudar na classificacao automatica, reduzindo erros e acelerando decisoes criticas.
+O dataset vem do Kaggle com 2.126 exames ja rotulados por especialistas — perfeito para treinar um classificador.</a:t>
             </a:r>
           </a:p>
         </p:txBody>
@@ -3434,17 +3514,19 @@
         </p:nvSpPr>
         <p:spPr>
           <a:xfrm>
-            <a:off x="7772400" y="1188720"/>
-            <a:ext cx="3840480" cy="1280160"/>
+            <a:off x="7863840" y="1005840"/>
+            <a:ext cx="4023360" cy="1554480"/>
           </a:xfrm>
           <a:prstGeom prst="rect">
             <a:avLst/>
           </a:prstGeom>
           <a:solidFill>
-            <a:srgbClr val="2ECC71"/>
+            <a:srgbClr val="0A3A1A"/>
           </a:solidFill>
           <a:ln>
-            <a:noFill/>
+            <a:solidFill>
+              <a:srgbClr val="2ECC71"/>
+            </a:solidFill>
           </a:ln>
         </p:spPr>
         <p:style>
@@ -3462,40 +3544,102 @@
           </a:fontRef>
         </p:style>
         <p:txBody>
-          <a:bodyPr rtlCol="0" anchor="ctr" wrap="square"/>
+          <a:bodyPr rtlCol="0" anchor="ctr"/>
           <a:lstStyle/>
           <a:p>
             <a:pPr algn="ctr"/>
+          </a:p>
+        </p:txBody>
+      </p:sp>
+      <p:sp>
+        <p:nvSpPr>
+          <p:cNvPr id="6" name="TextBox 5"/>
+          <p:cNvSpPr txBox="1"/>
+          <p:nvPr/>
+        </p:nvSpPr>
+        <p:spPr>
+          <a:xfrm>
+            <a:off x="7955279" y="1051560"/>
+            <a:ext cx="3840480" cy="457200"/>
+          </a:xfrm>
+          <a:prstGeom prst="rect">
+            <a:avLst/>
+          </a:prstGeom>
+          <a:noFill/>
+        </p:spPr>
+        <p:txBody>
+          <a:bodyPr wrap="square">
+            <a:spAutoFit/>
+          </a:bodyPr>
+          <a:lstStyle/>
+          <a:p>
+            <a:pPr algn="l"/>
             <a:r>
               <a:rPr sz="2000" b="1">
                 <a:solidFill>
+                  <a:srgbClr val="2ECC71"/>
+                </a:solidFill>
+              </a:rPr>
+              <a:t>Normal</a:t>
+            </a:r>
+          </a:p>
+        </p:txBody>
+      </p:sp>
+      <p:sp>
+        <p:nvSpPr>
+          <p:cNvPr id="7" name="TextBox 6"/>
+          <p:cNvSpPr txBox="1"/>
+          <p:nvPr/>
+        </p:nvSpPr>
+        <p:spPr>
+          <a:xfrm>
+            <a:off x="7955279" y="1463040"/>
+            <a:ext cx="3840480" cy="365760"/>
+          </a:xfrm>
+          <a:prstGeom prst="rect">
+            <a:avLst/>
+          </a:prstGeom>
+          <a:noFill/>
+        </p:spPr>
+        <p:txBody>
+          <a:bodyPr wrap="square">
+            <a:spAutoFit/>
+          </a:bodyPr>
+          <a:lstStyle/>
+          <a:p>
+            <a:pPr algn="l"/>
+            <a:r>
+              <a:rPr sz="1400" b="0">
+                <a:solidFill>
                   <a:srgbClr val="FFFFFF"/>
                 </a:solidFill>
               </a:rPr>
-              <a:t>Normal  77.8%</a:t>
-            </a:r>
-          </a:p>
-        </p:txBody>
-      </p:sp>
-      <p:sp>
-        <p:nvSpPr>
-          <p:cNvPr id="6" name="Rectangle 5"/>
+              <a:t>77.8%  |  1.655 exames</a:t>
+            </a:r>
+          </a:p>
+        </p:txBody>
+      </p:sp>
+      <p:sp>
+        <p:nvSpPr>
+          <p:cNvPr id="8" name="Rectangle 7"/>
           <p:cNvSpPr/>
           <p:nvPr/>
         </p:nvSpPr>
         <p:spPr>
           <a:xfrm>
-            <a:off x="7772400" y="2834640"/>
-            <a:ext cx="3840480" cy="1280160"/>
+            <a:off x="7863840" y="2834640"/>
+            <a:ext cx="4023360" cy="1554480"/>
           </a:xfrm>
           <a:prstGeom prst="rect">
             <a:avLst/>
           </a:prstGeom>
           <a:solidFill>
-            <a:srgbClr val="F39C12"/>
+            <a:srgbClr val="3A2A0A"/>
           </a:solidFill>
           <a:ln>
-            <a:noFill/>
+            <a:solidFill>
+              <a:srgbClr val="F39C12"/>
+            </a:solidFill>
           </a:ln>
         </p:spPr>
         <p:style>
@@ -3513,40 +3657,102 @@
           </a:fontRef>
         </p:style>
         <p:txBody>
-          <a:bodyPr rtlCol="0" anchor="ctr" wrap="square"/>
+          <a:bodyPr rtlCol="0" anchor="ctr"/>
           <a:lstStyle/>
           <a:p>
             <a:pPr algn="ctr"/>
+          </a:p>
+        </p:txBody>
+      </p:sp>
+      <p:sp>
+        <p:nvSpPr>
+          <p:cNvPr id="9" name="TextBox 8"/>
+          <p:cNvSpPr txBox="1"/>
+          <p:nvPr/>
+        </p:nvSpPr>
+        <p:spPr>
+          <a:xfrm>
+            <a:off x="7955279" y="2880360"/>
+            <a:ext cx="3840480" cy="457200"/>
+          </a:xfrm>
+          <a:prstGeom prst="rect">
+            <a:avLst/>
+          </a:prstGeom>
+          <a:noFill/>
+        </p:spPr>
+        <p:txBody>
+          <a:bodyPr wrap="square">
+            <a:spAutoFit/>
+          </a:bodyPr>
+          <a:lstStyle/>
+          <a:p>
+            <a:pPr algn="l"/>
             <a:r>
               <a:rPr sz="2000" b="1">
                 <a:solidFill>
+                  <a:srgbClr val="F39C12"/>
+                </a:solidFill>
+              </a:rPr>
+              <a:t>Suspect</a:t>
+            </a:r>
+          </a:p>
+        </p:txBody>
+      </p:sp>
+      <p:sp>
+        <p:nvSpPr>
+          <p:cNvPr id="10" name="TextBox 9"/>
+          <p:cNvSpPr txBox="1"/>
+          <p:nvPr/>
+        </p:nvSpPr>
+        <p:spPr>
+          <a:xfrm>
+            <a:off x="7955279" y="3291840"/>
+            <a:ext cx="3840480" cy="365760"/>
+          </a:xfrm>
+          <a:prstGeom prst="rect">
+            <a:avLst/>
+          </a:prstGeom>
+          <a:noFill/>
+        </p:spPr>
+        <p:txBody>
+          <a:bodyPr wrap="square">
+            <a:spAutoFit/>
+          </a:bodyPr>
+          <a:lstStyle/>
+          <a:p>
+            <a:pPr algn="l"/>
+            <a:r>
+              <a:rPr sz="1400" b="0">
+                <a:solidFill>
                   <a:srgbClr val="FFFFFF"/>
                 </a:solidFill>
               </a:rPr>
-              <a:t>Suspect  13.9%</a:t>
-            </a:r>
-          </a:p>
-        </p:txBody>
-      </p:sp>
-      <p:sp>
-        <p:nvSpPr>
-          <p:cNvPr id="7" name="Rectangle 6"/>
+              <a:t>13.9%  |  295 exames</a:t>
+            </a:r>
+          </a:p>
+        </p:txBody>
+      </p:sp>
+      <p:sp>
+        <p:nvSpPr>
+          <p:cNvPr id="11" name="Rectangle 10"/>
           <p:cNvSpPr/>
           <p:nvPr/>
         </p:nvSpPr>
         <p:spPr>
           <a:xfrm>
-            <a:off x="7772400" y="4480560"/>
-            <a:ext cx="3840480" cy="1280160"/>
+            <a:off x="7863840" y="4663440"/>
+            <a:ext cx="4023360" cy="1554480"/>
           </a:xfrm>
           <a:prstGeom prst="rect">
             <a:avLst/>
           </a:prstGeom>
           <a:solidFill>
-            <a:srgbClr val="E74C3C"/>
+            <a:srgbClr val="3A0A0A"/>
           </a:solidFill>
           <a:ln>
-            <a:noFill/>
+            <a:solidFill>
+              <a:srgbClr val="E74C3C"/>
+            </a:solidFill>
           </a:ln>
         </p:spPr>
         <p:style>
@@ -3564,17 +3770,77 @@
           </a:fontRef>
         </p:style>
         <p:txBody>
-          <a:bodyPr rtlCol="0" anchor="ctr" wrap="square"/>
+          <a:bodyPr rtlCol="0" anchor="ctr"/>
           <a:lstStyle/>
           <a:p>
             <a:pPr algn="ctr"/>
+          </a:p>
+        </p:txBody>
+      </p:sp>
+      <p:sp>
+        <p:nvSpPr>
+          <p:cNvPr id="12" name="TextBox 11"/>
+          <p:cNvSpPr txBox="1"/>
+          <p:nvPr/>
+        </p:nvSpPr>
+        <p:spPr>
+          <a:xfrm>
+            <a:off x="7955279" y="4709160"/>
+            <a:ext cx="3840480" cy="457200"/>
+          </a:xfrm>
+          <a:prstGeom prst="rect">
+            <a:avLst/>
+          </a:prstGeom>
+          <a:noFill/>
+        </p:spPr>
+        <p:txBody>
+          <a:bodyPr wrap="square">
+            <a:spAutoFit/>
+          </a:bodyPr>
+          <a:lstStyle/>
+          <a:p>
+            <a:pPr algn="l"/>
             <a:r>
               <a:rPr sz="2000" b="1">
                 <a:solidFill>
+                  <a:srgbClr val="E74C3C"/>
+                </a:solidFill>
+              </a:rPr>
+              <a:t>Pathological</a:t>
+            </a:r>
+          </a:p>
+        </p:txBody>
+      </p:sp>
+      <p:sp>
+        <p:nvSpPr>
+          <p:cNvPr id="13" name="TextBox 12"/>
+          <p:cNvSpPr txBox="1"/>
+          <p:nvPr/>
+        </p:nvSpPr>
+        <p:spPr>
+          <a:xfrm>
+            <a:off x="7955279" y="5120640"/>
+            <a:ext cx="3840480" cy="365760"/>
+          </a:xfrm>
+          <a:prstGeom prst="rect">
+            <a:avLst/>
+          </a:prstGeom>
+          <a:noFill/>
+        </p:spPr>
+        <p:txBody>
+          <a:bodyPr wrap="square">
+            <a:spAutoFit/>
+          </a:bodyPr>
+          <a:lstStyle/>
+          <a:p>
+            <a:pPr algn="l"/>
+            <a:r>
+              <a:rPr sz="1400" b="0">
+                <a:solidFill>
                   <a:srgbClr val="FFFFFF"/>
                 </a:solidFill>
               </a:rPr>
-              <a:t>Pathological  8.3%</a:t>
+              <a:t>8.3%  |  176 exames — urgente</a:t>
             </a:r>
           </a:p>
         </p:txBody>
@@ -3613,8 +3879,8 @@
         </p:nvSpPr>
         <p:spPr>
           <a:xfrm>
-            <a:off x="0" y="164592"/>
-            <a:ext cx="12188952" cy="64008"/>
+            <a:off x="0" y="201168"/>
+            <a:ext cx="12188952" cy="54864"/>
           </a:xfrm>
           <a:prstGeom prst="rect">
             <a:avLst/>
@@ -3657,7 +3923,7 @@
         <p:spPr>
           <a:xfrm>
             <a:off x="457200" y="365760"/>
-            <a:ext cx="10972800" cy="548640"/>
+            <a:ext cx="10972800" cy="502920"/>
           </a:xfrm>
           <a:prstGeom prst="rect">
             <a:avLst/>
@@ -3672,26 +3938,60 @@
           <a:p>
             <a:pPr algn="l"/>
             <a:r>
-              <a:rPr sz="3200" b="1">
+              <a:rPr sz="3000" b="1">
                 <a:solidFill>
                   <a:srgbClr val="00B4D8"/>
                 </a:solidFill>
               </a:rPr>
-              <a:t>Arquitetura do Pipeline</a:t>
-            </a:r>
-          </a:p>
-        </p:txBody>
-      </p:sp>
-      <p:sp>
-        <p:nvSpPr>
-          <p:cNvPr id="4" name="Rectangle 3"/>
+              <a:t>Como eu montei o pipeline — visao geral</a:t>
+            </a:r>
+          </a:p>
+        </p:txBody>
+      </p:sp>
+      <p:sp>
+        <p:nvSpPr>
+          <p:cNvPr id="4" name="TextBox 3"/>
+          <p:cNvSpPr txBox="1"/>
+          <p:nvPr/>
+        </p:nvSpPr>
+        <p:spPr>
+          <a:xfrm>
+            <a:off x="457200" y="960120"/>
+            <a:ext cx="10972800" cy="365760"/>
+          </a:xfrm>
+          <a:prstGeom prst="rect">
+            <a:avLst/>
+          </a:prstGeom>
+          <a:noFill/>
+        </p:spPr>
+        <p:txBody>
+          <a:bodyPr wrap="square">
+            <a:spAutoFit/>
+          </a:bodyPr>
+          <a:lstStyle/>
+          <a:p>
+            <a:pPr algn="l"/>
+            <a:r>
+              <a:rPr sz="1500" b="0">
+                <a:solidFill>
+                  <a:srgbClr val="AABBCC"/>
+                </a:solidFill>
+              </a:rPr>
+              <a:t>Cada ferramenta tem uma funcao especifica. Nenhuma e redundante — e um fluxo que qualquer empresa de dados usaria.</a:t>
+            </a:r>
+          </a:p>
+        </p:txBody>
+      </p:sp>
+      <p:sp>
+        <p:nvSpPr>
+          <p:cNvPr id="5" name="Rectangle 4"/>
           <p:cNvSpPr/>
           <p:nvPr/>
         </p:nvSpPr>
         <p:spPr>
           <a:xfrm>
-            <a:off x="274320" y="1188720"/>
-            <a:ext cx="1463040" cy="914400"/>
+            <a:off x="320040" y="1508760"/>
+            <a:ext cx="1508760" cy="1005840"/>
           </a:xfrm>
           <a:prstGeom prst="rect">
             <a:avLst/>
@@ -3723,26 +4023,27 @@
           <a:p>
             <a:pPr algn="ctr"/>
             <a:r>
-              <a:rPr sz="1100" b="1">
+              <a:rPr sz="1200" b="1">
                 <a:solidFill>
                   <a:srgbClr val="0D1B2A"/>
                 </a:solidFill>
               </a:rPr>
-              <a:t>1. Kaggle CSV</a:t>
-            </a:r>
-          </a:p>
-        </p:txBody>
-      </p:sp>
-      <p:sp>
-        <p:nvSpPr>
-          <p:cNvPr id="5" name="TextBox 4"/>
+              <a:t>Kaggle
+CSV</a:t>
+            </a:r>
+          </a:p>
+        </p:txBody>
+      </p:sp>
+      <p:sp>
+        <p:nvSpPr>
+          <p:cNvPr id="6" name="TextBox 5"/>
           <p:cNvSpPr txBox="1"/>
           <p:nvPr/>
         </p:nvSpPr>
         <p:spPr>
           <a:xfrm>
-            <a:off x="228600" y="2286000"/>
-            <a:ext cx="1554480" cy="1097280"/>
+            <a:off x="274320" y="2651760"/>
+            <a:ext cx="1600200" cy="365760"/>
           </a:xfrm>
           <a:prstGeom prst="rect">
             <a:avLst/>
@@ -3759,25 +4060,24 @@
             <a:r>
               <a:rPr sz="1100" b="0">
                 <a:solidFill>
-                  <a:srgbClr val="FFFFFF"/>
-                </a:solidFill>
-              </a:rPr>
-              <a:t>Fonte dos dados
-fetal_health.csv</a:t>
-            </a:r>
-          </a:p>
-        </p:txBody>
-      </p:sp>
-      <p:sp>
-        <p:nvSpPr>
-          <p:cNvPr id="6" name="Rectangle 5"/>
+                  <a:srgbClr val="AABBCC"/>
+                </a:solidFill>
+              </a:rPr>
+              <a:t>Fonte</a:t>
+            </a:r>
+          </a:p>
+        </p:txBody>
+      </p:sp>
+      <p:sp>
+        <p:nvSpPr>
+          <p:cNvPr id="7" name="Rectangle 6"/>
           <p:cNvSpPr/>
           <p:nvPr/>
         </p:nvSpPr>
         <p:spPr>
           <a:xfrm>
-            <a:off x="1755648" y="1536192"/>
-            <a:ext cx="201168" cy="228600"/>
+            <a:off x="1847088" y="1874519"/>
+            <a:ext cx="155448" cy="274320"/>
           </a:xfrm>
           <a:prstGeom prst="rect">
             <a:avLst/>
@@ -3813,14 +4113,14 @@
       </p:sp>
       <p:sp>
         <p:nvSpPr>
-          <p:cNvPr id="7" name="Rectangle 6"/>
+          <p:cNvPr id="8" name="Rectangle 7"/>
           <p:cNvSpPr/>
           <p:nvPr/>
         </p:nvSpPr>
         <p:spPr>
           <a:xfrm>
-            <a:off x="1956816" y="1188720"/>
-            <a:ext cx="1463040" cy="914400"/>
+            <a:off x="2002536" y="1508760"/>
+            <a:ext cx="1508760" cy="1005840"/>
           </a:xfrm>
           <a:prstGeom prst="rect">
             <a:avLst/>
@@ -3852,26 +4152,27 @@
           <a:p>
             <a:pPr algn="ctr"/>
             <a:r>
-              <a:rPr sz="1100" b="1">
+              <a:rPr sz="1200" b="1">
                 <a:solidFill>
                   <a:srgbClr val="0D1B2A"/>
                 </a:solidFill>
               </a:rPr>
-              <a:t>2. Supabase</a:t>
-            </a:r>
-          </a:p>
-        </p:txBody>
-      </p:sp>
-      <p:sp>
-        <p:nvSpPr>
-          <p:cNvPr id="8" name="TextBox 7"/>
+              <a:t>Supabase
+PostgreSQL</a:t>
+            </a:r>
+          </a:p>
+        </p:txBody>
+      </p:sp>
+      <p:sp>
+        <p:nvSpPr>
+          <p:cNvPr id="9" name="TextBox 8"/>
           <p:cNvSpPr txBox="1"/>
           <p:nvPr/>
         </p:nvSpPr>
         <p:spPr>
           <a:xfrm>
-            <a:off x="1911096" y="2286000"/>
-            <a:ext cx="1554480" cy="1097280"/>
+            <a:off x="1956816" y="2651760"/>
+            <a:ext cx="1600200" cy="365760"/>
           </a:xfrm>
           <a:prstGeom prst="rect">
             <a:avLst/>
@@ -3888,25 +4189,24 @@
             <a:r>
               <a:rPr sz="1100" b="0">
                 <a:solidFill>
-                  <a:srgbClr val="FFFFFF"/>
-                </a:solidFill>
-              </a:rPr>
-              <a:t>Banco PostgreSQL
-na nuvem</a:t>
-            </a:r>
-          </a:p>
-        </p:txBody>
-      </p:sp>
-      <p:sp>
-        <p:nvSpPr>
-          <p:cNvPr id="9" name="Rectangle 8"/>
+                  <a:srgbClr val="AABBCC"/>
+                </a:solidFill>
+              </a:rPr>
+              <a:t>Armazenar</a:t>
+            </a:r>
+          </a:p>
+        </p:txBody>
+      </p:sp>
+      <p:sp>
+        <p:nvSpPr>
+          <p:cNvPr id="10" name="Rectangle 9"/>
           <p:cNvSpPr/>
           <p:nvPr/>
         </p:nvSpPr>
         <p:spPr>
           <a:xfrm>
-            <a:off x="3438144" y="1536192"/>
-            <a:ext cx="201168" cy="228600"/>
+            <a:off x="3529584" y="1874519"/>
+            <a:ext cx="155448" cy="274320"/>
           </a:xfrm>
           <a:prstGeom prst="rect">
             <a:avLst/>
@@ -3942,14 +4242,14 @@
       </p:sp>
       <p:sp>
         <p:nvSpPr>
-          <p:cNvPr id="10" name="Rectangle 9"/>
+          <p:cNvPr id="11" name="Rectangle 10"/>
           <p:cNvSpPr/>
           <p:nvPr/>
         </p:nvSpPr>
         <p:spPr>
           <a:xfrm>
-            <a:off x="3639312" y="1188720"/>
-            <a:ext cx="1463040" cy="914400"/>
+            <a:off x="3685032" y="1508760"/>
+            <a:ext cx="1508760" cy="1005840"/>
           </a:xfrm>
           <a:prstGeom prst="rect">
             <a:avLst/>
@@ -3981,26 +4281,27 @@
           <a:p>
             <a:pPr algn="ctr"/>
             <a:r>
-              <a:rPr sz="1100" b="1">
+              <a:rPr sz="1200" b="1">
                 <a:solidFill>
                   <a:srgbClr val="0D1B2A"/>
                 </a:solidFill>
               </a:rPr>
-              <a:t>3. DuckDB</a:t>
-            </a:r>
-          </a:p>
-        </p:txBody>
-      </p:sp>
-      <p:sp>
-        <p:nvSpPr>
-          <p:cNvPr id="11" name="TextBox 10"/>
+              <a:t>DuckDB
+SQL</a:t>
+            </a:r>
+          </a:p>
+        </p:txBody>
+      </p:sp>
+      <p:sp>
+        <p:nvSpPr>
+          <p:cNvPr id="12" name="TextBox 11"/>
           <p:cNvSpPr txBox="1"/>
           <p:nvPr/>
         </p:nvSpPr>
         <p:spPr>
           <a:xfrm>
-            <a:off x="3593592" y="2286000"/>
-            <a:ext cx="1554480" cy="1097280"/>
+            <a:off x="3639312" y="2651760"/>
+            <a:ext cx="1600200" cy="365760"/>
           </a:xfrm>
           <a:prstGeom prst="rect">
             <a:avLst/>
@@ -4017,25 +4318,24 @@
             <a:r>
               <a:rPr sz="1100" b="0">
                 <a:solidFill>
-                  <a:srgbClr val="FFFFFF"/>
-                </a:solidFill>
-              </a:rPr>
-              <a:t>Feature Engineering
-via SQL em memoria</a:t>
-            </a:r>
-          </a:p>
-        </p:txBody>
-      </p:sp>
-      <p:sp>
-        <p:nvSpPr>
-          <p:cNvPr id="12" name="Rectangle 11"/>
+                  <a:srgbClr val="AABBCC"/>
+                </a:solidFill>
+              </a:rPr>
+              <a:t>Transformar</a:t>
+            </a:r>
+          </a:p>
+        </p:txBody>
+      </p:sp>
+      <p:sp>
+        <p:nvSpPr>
+          <p:cNvPr id="13" name="Rectangle 12"/>
           <p:cNvSpPr/>
           <p:nvPr/>
         </p:nvSpPr>
         <p:spPr>
           <a:xfrm>
-            <a:off x="5120640" y="1536192"/>
-            <a:ext cx="201168" cy="228600"/>
+            <a:off x="5212080" y="1874519"/>
+            <a:ext cx="155448" cy="274320"/>
           </a:xfrm>
           <a:prstGeom prst="rect">
             <a:avLst/>
@@ -4071,14 +4371,14 @@
       </p:sp>
       <p:sp>
         <p:nvSpPr>
-          <p:cNvPr id="13" name="Rectangle 12"/>
+          <p:cNvPr id="14" name="Rectangle 13"/>
           <p:cNvSpPr/>
           <p:nvPr/>
         </p:nvSpPr>
         <p:spPr>
           <a:xfrm>
-            <a:off x="5321808" y="1188720"/>
-            <a:ext cx="1463040" cy="914400"/>
+            <a:off x="5367528" y="1508760"/>
+            <a:ext cx="1508760" cy="1005840"/>
           </a:xfrm>
           <a:prstGeom prst="rect">
             <a:avLst/>
@@ -4110,26 +4410,27 @@
           <a:p>
             <a:pPr algn="ctr"/>
             <a:r>
-              <a:rPr sz="1100" b="1">
+              <a:rPr sz="1200" b="1">
                 <a:solidFill>
                   <a:srgbClr val="0D1B2A"/>
                 </a:solidFill>
               </a:rPr>
-              <a:t>4. DVC / DagsHub</a:t>
-            </a:r>
-          </a:p>
-        </p:txBody>
-      </p:sp>
-      <p:sp>
-        <p:nvSpPr>
-          <p:cNvPr id="14" name="TextBox 13"/>
+              <a:t>DVC +
+DagsHub</a:t>
+            </a:r>
+          </a:p>
+        </p:txBody>
+      </p:sp>
+      <p:sp>
+        <p:nvSpPr>
+          <p:cNvPr id="15" name="TextBox 14"/>
           <p:cNvSpPr txBox="1"/>
           <p:nvPr/>
         </p:nvSpPr>
         <p:spPr>
           <a:xfrm>
-            <a:off x="5276088" y="2286000"/>
-            <a:ext cx="1554480" cy="1097280"/>
+            <a:off x="5321808" y="2651760"/>
+            <a:ext cx="1600200" cy="365760"/>
           </a:xfrm>
           <a:prstGeom prst="rect">
             <a:avLst/>
@@ -4146,25 +4447,24 @@
             <a:r>
               <a:rPr sz="1100" b="0">
                 <a:solidFill>
-                  <a:srgbClr val="FFFFFF"/>
-                </a:solidFill>
-              </a:rPr>
-              <a:t>Versionamento
-de dados e modelos</a:t>
-            </a:r>
-          </a:p>
-        </p:txBody>
-      </p:sp>
-      <p:sp>
-        <p:nvSpPr>
-          <p:cNvPr id="15" name="Rectangle 14"/>
+                  <a:srgbClr val="AABBCC"/>
+                </a:solidFill>
+              </a:rPr>
+              <a:t>Versionar</a:t>
+            </a:r>
+          </a:p>
+        </p:txBody>
+      </p:sp>
+      <p:sp>
+        <p:nvSpPr>
+          <p:cNvPr id="16" name="Rectangle 15"/>
           <p:cNvSpPr/>
           <p:nvPr/>
         </p:nvSpPr>
         <p:spPr>
           <a:xfrm>
-            <a:off x="6803136" y="1536192"/>
-            <a:ext cx="201168" cy="228600"/>
+            <a:off x="6894576" y="1874519"/>
+            <a:ext cx="155448" cy="274320"/>
           </a:xfrm>
           <a:prstGeom prst="rect">
             <a:avLst/>
@@ -4200,14 +4500,14 @@
       </p:sp>
       <p:sp>
         <p:nvSpPr>
-          <p:cNvPr id="16" name="Rectangle 15"/>
+          <p:cNvPr id="17" name="Rectangle 16"/>
           <p:cNvSpPr/>
           <p:nvPr/>
         </p:nvSpPr>
         <p:spPr>
           <a:xfrm>
-            <a:off x="7004304" y="1188720"/>
-            <a:ext cx="1463040" cy="914400"/>
+            <a:off x="7050024" y="1508760"/>
+            <a:ext cx="1508760" cy="1005840"/>
           </a:xfrm>
           <a:prstGeom prst="rect">
             <a:avLst/>
@@ -4239,26 +4539,27 @@
           <a:p>
             <a:pPr algn="ctr"/>
             <a:r>
-              <a:rPr sz="1100" b="1">
+              <a:rPr sz="1200" b="1">
                 <a:solidFill>
                   <a:srgbClr val="0D1B2A"/>
                 </a:solidFill>
               </a:rPr>
-              <a:t>5. MLflow</a:t>
-            </a:r>
-          </a:p>
-        </p:txBody>
-      </p:sp>
-      <p:sp>
-        <p:nvSpPr>
-          <p:cNvPr id="17" name="TextBox 16"/>
+              <a:t>MLflow
+Experimentos</a:t>
+            </a:r>
+          </a:p>
+        </p:txBody>
+      </p:sp>
+      <p:sp>
+        <p:nvSpPr>
+          <p:cNvPr id="18" name="TextBox 17"/>
           <p:cNvSpPr txBox="1"/>
           <p:nvPr/>
         </p:nvSpPr>
         <p:spPr>
           <a:xfrm>
-            <a:off x="6958584" y="2286000"/>
-            <a:ext cx="1554480" cy="1097280"/>
+            <a:off x="7004304" y="2651760"/>
+            <a:ext cx="1600200" cy="365760"/>
           </a:xfrm>
           <a:prstGeom prst="rect">
             <a:avLst/>
@@ -4275,25 +4576,24 @@
             <a:r>
               <a:rPr sz="1100" b="0">
                 <a:solidFill>
-                  <a:srgbClr val="FFFFFF"/>
-                </a:solidFill>
-              </a:rPr>
-              <a:t>Experimentos
-e Model Registry</a:t>
-            </a:r>
-          </a:p>
-        </p:txBody>
-      </p:sp>
-      <p:sp>
-        <p:nvSpPr>
-          <p:cNvPr id="18" name="Rectangle 17"/>
+                  <a:srgbClr val="AABBCC"/>
+                </a:solidFill>
+              </a:rPr>
+              <a:t>Treinar</a:t>
+            </a:r>
+          </a:p>
+        </p:txBody>
+      </p:sp>
+      <p:sp>
+        <p:nvSpPr>
+          <p:cNvPr id="19" name="Rectangle 18"/>
           <p:cNvSpPr/>
           <p:nvPr/>
         </p:nvSpPr>
         <p:spPr>
           <a:xfrm>
-            <a:off x="8485632" y="1536192"/>
-            <a:ext cx="201168" cy="228600"/>
+            <a:off x="8577072" y="1874519"/>
+            <a:ext cx="155448" cy="274320"/>
           </a:xfrm>
           <a:prstGeom prst="rect">
             <a:avLst/>
@@ -4329,14 +4629,14 @@
       </p:sp>
       <p:sp>
         <p:nvSpPr>
-          <p:cNvPr id="19" name="Rectangle 18"/>
+          <p:cNvPr id="20" name="Rectangle 19"/>
           <p:cNvSpPr/>
           <p:nvPr/>
         </p:nvSpPr>
         <p:spPr>
           <a:xfrm>
-            <a:off x="8686800" y="1188720"/>
-            <a:ext cx="1463040" cy="914400"/>
+            <a:off x="8732520" y="1508760"/>
+            <a:ext cx="1508760" cy="1005840"/>
           </a:xfrm>
           <a:prstGeom prst="rect">
             <a:avLst/>
@@ -4368,26 +4668,27 @@
           <a:p>
             <a:pPr algn="ctr"/>
             <a:r>
-              <a:rPr sz="1100" b="1">
+              <a:rPr sz="1200" b="1">
                 <a:solidFill>
                   <a:srgbClr val="0D1B2A"/>
                 </a:solidFill>
               </a:rPr>
-              <a:t>6. Docker + Render</a:t>
-            </a:r>
-          </a:p>
-        </p:txBody>
-      </p:sp>
-      <p:sp>
-        <p:nvSpPr>
-          <p:cNvPr id="20" name="TextBox 19"/>
+              <a:t>Docker
+Container</a:t>
+            </a:r>
+          </a:p>
+        </p:txBody>
+      </p:sp>
+      <p:sp>
+        <p:nvSpPr>
+          <p:cNvPr id="21" name="TextBox 20"/>
           <p:cNvSpPr txBox="1"/>
           <p:nvPr/>
         </p:nvSpPr>
         <p:spPr>
           <a:xfrm>
-            <a:off x="8641080" y="2286000"/>
-            <a:ext cx="1554480" cy="1097280"/>
+            <a:off x="8686800" y="2651760"/>
+            <a:ext cx="1600200" cy="365760"/>
           </a:xfrm>
           <a:prstGeom prst="rect">
             <a:avLst/>
@@ -4404,25 +4705,24 @@
             <a:r>
               <a:rPr sz="1100" b="0">
                 <a:solidFill>
-                  <a:srgbClr val="FFFFFF"/>
-                </a:solidFill>
-              </a:rPr>
-              <a:t>Containerizacao
-e deploy</a:t>
-            </a:r>
-          </a:p>
-        </p:txBody>
-      </p:sp>
-      <p:sp>
-        <p:nvSpPr>
-          <p:cNvPr id="21" name="Rectangle 20"/>
+                  <a:srgbClr val="AABBCC"/>
+                </a:solidFill>
+              </a:rPr>
+              <a:t>Empacotar</a:t>
+            </a:r>
+          </a:p>
+        </p:txBody>
+      </p:sp>
+      <p:sp>
+        <p:nvSpPr>
+          <p:cNvPr id="22" name="Rectangle 21"/>
           <p:cNvSpPr/>
           <p:nvPr/>
         </p:nvSpPr>
         <p:spPr>
           <a:xfrm>
-            <a:off x="10168128" y="1536192"/>
-            <a:ext cx="201168" cy="228600"/>
+            <a:off x="10259568" y="1874519"/>
+            <a:ext cx="155448" cy="274320"/>
           </a:xfrm>
           <a:prstGeom prst="rect">
             <a:avLst/>
@@ -4458,14 +4758,14 @@
       </p:sp>
       <p:sp>
         <p:nvSpPr>
-          <p:cNvPr id="22" name="Rectangle 21"/>
+          <p:cNvPr id="23" name="Rectangle 22"/>
           <p:cNvSpPr/>
           <p:nvPr/>
         </p:nvSpPr>
         <p:spPr>
           <a:xfrm>
-            <a:off x="10369296" y="1188720"/>
-            <a:ext cx="1463040" cy="914400"/>
+            <a:off x="10415016" y="1508760"/>
+            <a:ext cx="1508760" cy="1005840"/>
           </a:xfrm>
           <a:prstGeom prst="rect">
             <a:avLst/>
@@ -4497,26 +4797,27 @@
           <a:p>
             <a:pPr algn="ctr"/>
             <a:r>
-              <a:rPr sz="1100" b="1">
+              <a:rPr sz="1200" b="1">
                 <a:solidFill>
                   <a:srgbClr val="0D1B2A"/>
                 </a:solidFill>
               </a:rPr>
-              <a:t>7. Streamlit</a:t>
-            </a:r>
-          </a:p>
-        </p:txBody>
-      </p:sp>
-      <p:sp>
-        <p:nvSpPr>
-          <p:cNvPr id="23" name="TextBox 22"/>
+              <a:t>Render
+Streamlit</a:t>
+            </a:r>
+          </a:p>
+        </p:txBody>
+      </p:sp>
+      <p:sp>
+        <p:nvSpPr>
+          <p:cNvPr id="24" name="TextBox 23"/>
           <p:cNvSpPr txBox="1"/>
           <p:nvPr/>
         </p:nvSpPr>
         <p:spPr>
           <a:xfrm>
-            <a:off x="10323576" y="2286000"/>
-            <a:ext cx="1554480" cy="1097280"/>
+            <a:off x="10369296" y="2651760"/>
+            <a:ext cx="1600200" cy="365760"/>
           </a:xfrm>
           <a:prstGeom prst="rect">
             <a:avLst/>
@@ -4533,25 +4834,24 @@
             <a:r>
               <a:rPr sz="1100" b="0">
                 <a:solidFill>
-                  <a:srgbClr val="FFFFFF"/>
-                </a:solidFill>
-              </a:rPr>
-              <a:t>App publica
-interativa</a:t>
-            </a:r>
-          </a:p>
-        </p:txBody>
-      </p:sp>
-      <p:sp>
-        <p:nvSpPr>
-          <p:cNvPr id="24" name="TextBox 23"/>
+                  <a:srgbClr val="AABBCC"/>
+                </a:solidFill>
+              </a:rPr>
+              <a:t>Publicar</a:t>
+            </a:r>
+          </a:p>
+        </p:txBody>
+      </p:sp>
+      <p:sp>
+        <p:nvSpPr>
+          <p:cNvPr id="25" name="TextBox 24"/>
           <p:cNvSpPr txBox="1"/>
           <p:nvPr/>
         </p:nvSpPr>
         <p:spPr>
           <a:xfrm>
-            <a:off x="457200" y="3566160"/>
-            <a:ext cx="10972800" cy="2560320"/>
+            <a:off x="457200" y="3154680"/>
+            <a:ext cx="10972800" cy="457200"/>
           </a:xfrm>
           <a:prstGeom prst="rect">
             <a:avLst/>
@@ -4566,15 +4866,51 @@
           <a:p>
             <a:pPr algn="l"/>
             <a:r>
-              <a:rPr sz="1600" b="0">
+              <a:rPr sz="1800" b="1">
+                <a:solidFill>
+                  <a:srgbClr val="00B4D8"/>
+                </a:solidFill>
+              </a:rPr>
+              <a:t>Por que esse fluxo faz sentido?</a:t>
+            </a:r>
+          </a:p>
+        </p:txBody>
+      </p:sp>
+      <p:sp>
+        <p:nvSpPr>
+          <p:cNvPr id="26" name="TextBox 25"/>
+          <p:cNvSpPr txBox="1"/>
+          <p:nvPr/>
+        </p:nvSpPr>
+        <p:spPr>
+          <a:xfrm>
+            <a:off x="457200" y="3611880"/>
+            <a:ext cx="10972800" cy="2651760"/>
+          </a:xfrm>
+          <a:prstGeom prst="rect">
+            <a:avLst/>
+          </a:prstGeom>
+          <a:noFill/>
+        </p:spPr>
+        <p:txBody>
+          <a:bodyPr wrap="square">
+            <a:spAutoFit/>
+          </a:bodyPr>
+          <a:lstStyle/>
+          <a:p>
+            <a:pPr algn="l"/>
+            <a:r>
+              <a:rPr sz="1500" b="0">
                 <a:solidFill>
                   <a:srgbClr val="FFFFFF"/>
                 </a:solidFill>
               </a:rPr>
-              <a:t>Reproducibilidade:
-  dvc repro   →   executa ingestion → preprocessing → train automaticamente
-CI/CD:
-  Push no GitHub → Render faz build e deploy automatico da imagem Docker</a:t>
+              <a:t>Cada etapa resolve um problema real:
+  •  Supabase simula um banco de dados de producao — nao e um CSV local jogado numa pasta.
+  •  DuckDB faz as transformacoes em SQL diretamente na memoria — sem precisar subir um servidor.
+  •  DVC versiona os dados como o Git versiona o codigo — qualquer pessoa pode reproduzir exatamente o que eu fiz.
+  •  MLflow registra cada experimento com metricas, parametros e o proprio modelo — sem isso a gente perde o historico.
+  •  Docker garante que o app roda igual em qualquer maquina — 'na minha funciona' deixa de existir.</a:t>
             </a:r>
           </a:p>
         </p:txBody>
@@ -4613,8 +4949,8 @@
         </p:nvSpPr>
         <p:spPr>
           <a:xfrm>
-            <a:off x="0" y="164592"/>
-            <a:ext cx="12188952" cy="64008"/>
+            <a:off x="0" y="201168"/>
+            <a:ext cx="12188952" cy="54864"/>
           </a:xfrm>
           <a:prstGeom prst="rect">
             <a:avLst/>
@@ -4657,7 +4993,7 @@
         <p:spPr>
           <a:xfrm>
             <a:off x="457200" y="365760"/>
-            <a:ext cx="10972800" cy="548640"/>
+            <a:ext cx="10972800" cy="502920"/>
           </a:xfrm>
           <a:prstGeom prst="rect">
             <a:avLst/>
@@ -4672,12 +5008,12 @@
           <a:p>
             <a:pPr algn="l"/>
             <a:r>
-              <a:rPr sz="3200" b="1">
+              <a:rPr sz="3000" b="1">
                 <a:solidFill>
                   <a:srgbClr val="00B4D8"/>
                 </a:solidFill>
               </a:rPr>
-              <a:t>Etapas de Dados</a:t>
+              <a:t>De onde vem os dados — Supabase e DuckDB</a:t>
             </a:r>
           </a:p>
         </p:txBody>
@@ -4690,8 +5026,8 @@
         </p:nvSpPr>
         <p:spPr>
           <a:xfrm>
-            <a:off x="365760" y="1097280"/>
-            <a:ext cx="3657600" cy="5303520"/>
+            <a:off x="365760" y="1005840"/>
+            <a:ext cx="5394960" cy="5394960"/>
           </a:xfrm>
           <a:prstGeom prst="rect">
             <a:avLst/>
@@ -4720,35 +5056,66 @@
           </a:fontRef>
         </p:style>
         <p:txBody>
-          <a:bodyPr rtlCol="0" anchor="ctr" wrap="square"/>
+          <a:bodyPr rtlCol="0" anchor="ctr"/>
+          <a:lstStyle/>
+          <a:p>
+            <a:pPr algn="ctr"/>
+          </a:p>
+        </p:txBody>
+      </p:sp>
+      <p:sp>
+        <p:nvSpPr>
+          <p:cNvPr id="5" name="TextBox 4"/>
+          <p:cNvSpPr txBox="1"/>
+          <p:nvPr/>
+        </p:nvSpPr>
+        <p:spPr>
+          <a:xfrm>
+            <a:off x="502920" y="1097280"/>
+            <a:ext cx="5120640" cy="5120640"/>
+          </a:xfrm>
+          <a:prstGeom prst="rect">
+            <a:avLst/>
+          </a:prstGeom>
+          <a:noFill/>
+        </p:spPr>
+        <p:txBody>
+          <a:bodyPr wrap="square">
+            <a:spAutoFit/>
+          </a:bodyPr>
           <a:lstStyle/>
           <a:p>
             <a:pPr algn="l"/>
             <a:r>
-              <a:rPr sz="1500">
+              <a:rPr sz="1400" b="0">
                 <a:solidFill>
                   <a:srgbClr val="FFFFFF"/>
                 </a:solidFill>
               </a:rPr>
-              <a:t>SUPABASE
-• PostgreSQL gerenciado
-• 2.126 registros inseridos via API
-• Credenciais no .env (fora do git)
-• ingestion.py faz paginacao automatica</a:t>
-            </a:r>
-          </a:p>
-        </p:txBody>
-      </p:sp>
-      <p:sp>
-        <p:nvSpPr>
-          <p:cNvPr id="5" name="Rectangle 4"/>
+              <a:t>SUPABASE  —  o banco de dados na nuvem
+Em vez de usar um CSV local, eu subi os dados para o Supabase — um PostgreSQL gerenciado e gratuito.
+Por que isso importa?
+Porta: simula como dados chegam em producao (via API, nao via arquivo).
+O que o ingestion.py faz:
+  1. Conecta ao Supabase com a chave de API
+  2. Baixa os 2.126 registros em paginas de 1.000
+  3. Salva como CSV em data/raw/
+Credenciais ficam no .env — nunca no git.
+Se alguem clonar o repo, precisa das proprias credenciais.</a:t>
+            </a:r>
+          </a:p>
+        </p:txBody>
+      </p:sp>
+      <p:sp>
+        <p:nvSpPr>
+          <p:cNvPr id="6" name="Rectangle 5"/>
           <p:cNvSpPr/>
           <p:nvPr/>
         </p:nvSpPr>
         <p:spPr>
           <a:xfrm>
-            <a:off x="4297680" y="1097280"/>
-            <a:ext cx="3657600" cy="5303520"/>
+            <a:off x="6309360" y="1005840"/>
+            <a:ext cx="5532120" cy="5394960"/>
           </a:xfrm>
           <a:prstGeom prst="rect">
             <a:avLst/>
@@ -4777,80 +5144,55 @@
           </a:fontRef>
         </p:style>
         <p:txBody>
-          <a:bodyPr rtlCol="0" anchor="ctr" wrap="square"/>
+          <a:bodyPr rtlCol="0" anchor="ctr"/>
+          <a:lstStyle/>
+          <a:p>
+            <a:pPr algn="ctr"/>
+          </a:p>
+        </p:txBody>
+      </p:sp>
+      <p:sp>
+        <p:nvSpPr>
+          <p:cNvPr id="7" name="TextBox 6"/>
+          <p:cNvSpPr txBox="1"/>
+          <p:nvPr/>
+        </p:nvSpPr>
+        <p:spPr>
+          <a:xfrm>
+            <a:off x="6446520" y="1097280"/>
+            <a:ext cx="5303520" cy="5120640"/>
+          </a:xfrm>
+          <a:prstGeom prst="rect">
+            <a:avLst/>
+          </a:prstGeom>
+          <a:noFill/>
+        </p:spPr>
+        <p:txBody>
+          <a:bodyPr wrap="square">
+            <a:spAutoFit/>
+          </a:bodyPr>
           <a:lstStyle/>
           <a:p>
             <a:pPr algn="l"/>
             <a:r>
-              <a:rPr sz="1500">
+              <a:rPr sz="1300" b="0">
                 <a:solidFill>
                   <a:srgbClr val="FFFFFF"/>
                 </a:solidFill>
               </a:rPr>
-              <a:t>DUCKDB
-• Feature engineering via SQL puro
-• 3 features derivadas criadas:
-  - accel_decel_ratio
-  - histogram_range
-  - histogram_skew_proxy
-• Resultado salvo em Parquet</a:t>
-            </a:r>
-          </a:p>
-        </p:txBody>
-      </p:sp>
-      <p:sp>
-        <p:nvSpPr>
-          <p:cNvPr id="6" name="Rectangle 5"/>
-          <p:cNvSpPr/>
-          <p:nvPr/>
-        </p:nvSpPr>
-        <p:spPr>
-          <a:xfrm>
-            <a:off x="8229600" y="1097280"/>
-            <a:ext cx="3657600" cy="5303520"/>
-          </a:xfrm>
-          <a:prstGeom prst="rect">
-            <a:avLst/>
-          </a:prstGeom>
-          <a:solidFill>
-            <a:srgbClr val="1A2A3A"/>
-          </a:solidFill>
-          <a:ln>
-            <a:solidFill>
-              <a:srgbClr val="F39C12"/>
-            </a:solidFill>
-          </a:ln>
-        </p:spPr>
-        <p:style>
-          <a:lnRef idx="1">
-            <a:schemeClr val="accent1"/>
-          </a:lnRef>
-          <a:fillRef idx="3">
-            <a:schemeClr val="accent1"/>
-          </a:fillRef>
-          <a:effectRef idx="2">
-            <a:schemeClr val="accent1"/>
-          </a:effectRef>
-          <a:fontRef idx="minor">
-            <a:schemeClr val="lt1"/>
-          </a:fontRef>
-        </p:style>
-        <p:txBody>
-          <a:bodyPr rtlCol="0" anchor="ctr" wrap="square"/>
-          <a:lstStyle/>
-          <a:p>
-            <a:pPr algn="l"/>
-            <a:r>
-              <a:rPr sz="1500">
-                <a:solidFill>
-                  <a:srgbClr val="FFFFFF"/>
-                </a:solidFill>
-              </a:rPr>
-              <a:t>DVC + DAGSHUB
-• dvc init + remote DagsHub
-• Pipeline em 3 estagios no dvc.yaml
-• dvc repro reproduce tudo
-• dvc push versiona os dados</a:t>
+              <a:t>DUCKDB  —  feature engineering em SQL puro
+DuckDB e um banco de dados que roda dentro do Python — sem servidor, sem configuracao.
+Voce passa um DataFrame, escreve SQL, pega o resultado. Simples assim.
+O que eu fiz no preprocessing.py:
+  •  Remove duplicatas com SELECT DISTINCT
+  •  Cria 3 features novas via SQL:
+     accel_decel_ratio
+     = aceleracoes / total de desaceleracoes
+     (quanto o coracao do bebe esta acelerando
+      em relacao a quanto esta desacelerando)
+     histogram_range = max - min
+     histogram_skew_proxy = media - mediana
+  •  Salva o resultado como Parquet em data/processed/</a:t>
             </a:r>
           </a:p>
         </p:txBody>
@@ -4889,8 +5231,8 @@
         </p:nvSpPr>
         <p:spPr>
           <a:xfrm>
-            <a:off x="0" y="164592"/>
-            <a:ext cx="12188952" cy="64008"/>
+            <a:off x="0" y="201168"/>
+            <a:ext cx="12188952" cy="54864"/>
           </a:xfrm>
           <a:prstGeom prst="rect">
             <a:avLst/>
@@ -4933,7 +5275,7 @@
         <p:spPr>
           <a:xfrm>
             <a:off x="457200" y="365760"/>
-            <a:ext cx="10972800" cy="548640"/>
+            <a:ext cx="10972800" cy="502920"/>
           </a:xfrm>
           <a:prstGeom prst="rect">
             <a:avLst/>
@@ -4948,12 +5290,12 @@
           <a:p>
             <a:pPr algn="l"/>
             <a:r>
-              <a:rPr sz="3200" b="1">
+              <a:rPr sz="3000" b="1">
                 <a:solidFill>
                   <a:srgbClr val="00B4D8"/>
                 </a:solidFill>
               </a:rPr>
-              <a:t>Experimentacao com MLflow</a:t>
+              <a:t>Versionamento — DVC e DagsHub</a:t>
             </a:r>
           </a:p>
         </p:txBody>
@@ -4966,7 +5308,7 @@
         </p:nvSpPr>
         <p:spPr>
           <a:xfrm>
-            <a:off x="457200" y="1005840"/>
+            <a:off x="457200" y="960120"/>
             <a:ext cx="10972800" cy="365760"/>
           </a:xfrm>
           <a:prstGeom prst="rect">
@@ -4987,30 +5329,80 @@
                   <a:srgbClr val="AABBCC"/>
                 </a:solidFill>
               </a:rPr>
-              <a:t>3 modelos treinados, metricas rastreadas no DagsHub, melhor promovido ao Model Registry (Production)</a:t>
-            </a:r>
-          </a:p>
-        </p:txBody>
-      </p:sp>
-      <p:sp>
-        <p:nvSpPr>
-          <p:cNvPr id="5" name="Rectangle 4"/>
+              <a:t>Problema: Git nao versiona arquivos grandes. Solucao: DVC faz isso por ele.</a:t>
+            </a:r>
+          </a:p>
+        </p:txBody>
+      </p:sp>
+      <p:sp>
+        <p:nvSpPr>
+          <p:cNvPr id="5" name="TextBox 4"/>
+          <p:cNvSpPr txBox="1"/>
+          <p:nvPr/>
+        </p:nvSpPr>
+        <p:spPr>
+          <a:xfrm>
+            <a:off x="457200" y="1463040"/>
+            <a:ext cx="5486400" cy="4937760"/>
+          </a:xfrm>
+          <a:prstGeom prst="rect">
+            <a:avLst/>
+          </a:prstGeom>
+          <a:noFill/>
+        </p:spPr>
+        <p:txBody>
+          <a:bodyPr wrap="square">
+            <a:spAutoFit/>
+          </a:bodyPr>
+          <a:lstStyle/>
+          <a:p>
+            <a:pPr algn="l"/>
+            <a:r>
+              <a:rPr sz="1500" b="0">
+                <a:solidFill>
+                  <a:srgbClr val="FFFFFF"/>
+                </a:solidFill>
+              </a:rPr>
+              <a:t>Como o DVC funciona na pratica:
+Quando voce roda  dvc add data/raw/fetal_health.csv
+o DVC nao guarda o arquivo no Git — guarda um hash dele.
+O arquivo real vai para o storage remoto (DagsHub).
+O dvc.yaml define o pipeline em 3 estagios:
+  ingestion.py
+      le do Supabase → salva CSV
+         ↓
+  preprocessing.py
+      le CSV → DuckDB → salva Parquet
+         ↓
+  train.py
+      le Parquet → treina → MLflow
+Com  dvc repro  qualquer pessoa reconstroi
+todo o pipeline do zero — automaticamente.</a:t>
+            </a:r>
+          </a:p>
+        </p:txBody>
+      </p:sp>
+      <p:sp>
+        <p:nvSpPr>
+          <p:cNvPr id="6" name="Rectangle 5"/>
           <p:cNvSpPr/>
           <p:nvPr/>
         </p:nvSpPr>
         <p:spPr>
           <a:xfrm>
-            <a:off x="365760" y="1554480"/>
-            <a:ext cx="2743200" cy="457200"/>
+            <a:off x="6217920" y="1417320"/>
+            <a:ext cx="5577840" cy="4937760"/>
           </a:xfrm>
           <a:prstGeom prst="rect">
             <a:avLst/>
           </a:prstGeom>
           <a:solidFill>
-            <a:srgbClr val="00B4D8"/>
+            <a:srgbClr val="1A2A3A"/>
           </a:solidFill>
           <a:ln>
-            <a:noFill/>
+            <a:solidFill>
+              <a:srgbClr val="A08CFF"/>
+            </a:solidFill>
           </a:ln>
         </p:spPr>
         <p:style>
@@ -5032,392 +5424,19 @@
           <a:lstStyle/>
           <a:p>
             <a:pPr algn="ctr"/>
-            <a:r>
-              <a:rPr sz="1500" b="1">
-                <a:solidFill>
-                  <a:srgbClr val="0D1B2A"/>
-                </a:solidFill>
-              </a:rPr>
-              <a:t>Modelo</a:t>
-            </a:r>
-          </a:p>
-        </p:txBody>
-      </p:sp>
-      <p:sp>
-        <p:nvSpPr>
-          <p:cNvPr id="6" name="Rectangle 5"/>
-          <p:cNvSpPr/>
-          <p:nvPr/>
-        </p:nvSpPr>
-        <p:spPr>
-          <a:xfrm>
-            <a:off x="3200400" y="1554480"/>
-            <a:ext cx="2743200" cy="457200"/>
-          </a:xfrm>
-          <a:prstGeom prst="rect">
-            <a:avLst/>
-          </a:prstGeom>
-          <a:solidFill>
-            <a:srgbClr val="00B4D8"/>
-          </a:solidFill>
-          <a:ln>
-            <a:noFill/>
-          </a:ln>
-        </p:spPr>
-        <p:style>
-          <a:lnRef idx="1">
-            <a:schemeClr val="accent1"/>
-          </a:lnRef>
-          <a:fillRef idx="3">
-            <a:schemeClr val="accent1"/>
-          </a:fillRef>
-          <a:effectRef idx="2">
-            <a:schemeClr val="accent1"/>
-          </a:effectRef>
-          <a:fontRef idx="minor">
-            <a:schemeClr val="lt1"/>
-          </a:fontRef>
-        </p:style>
-        <p:txBody>
-          <a:bodyPr rtlCol="0" anchor="ctr"/>
-          <a:lstStyle/>
-          <a:p>
-            <a:pPr algn="ctr"/>
-            <a:r>
-              <a:rPr sz="1500" b="1">
-                <a:solidFill>
-                  <a:srgbClr val="0D1B2A"/>
-                </a:solidFill>
-              </a:rPr>
-              <a:t>Accuracy</a:t>
-            </a:r>
-          </a:p>
-        </p:txBody>
-      </p:sp>
-      <p:sp>
-        <p:nvSpPr>
-          <p:cNvPr id="7" name="Rectangle 6"/>
-          <p:cNvSpPr/>
-          <p:nvPr/>
-        </p:nvSpPr>
-        <p:spPr>
-          <a:xfrm>
-            <a:off x="6035040" y="1554480"/>
-            <a:ext cx="2743200" cy="457200"/>
-          </a:xfrm>
-          <a:prstGeom prst="rect">
-            <a:avLst/>
-          </a:prstGeom>
-          <a:solidFill>
-            <a:srgbClr val="00B4D8"/>
-          </a:solidFill>
-          <a:ln>
-            <a:noFill/>
-          </a:ln>
-        </p:spPr>
-        <p:style>
-          <a:lnRef idx="1">
-            <a:schemeClr val="accent1"/>
-          </a:lnRef>
-          <a:fillRef idx="3">
-            <a:schemeClr val="accent1"/>
-          </a:fillRef>
-          <a:effectRef idx="2">
-            <a:schemeClr val="accent1"/>
-          </a:effectRef>
-          <a:fontRef idx="minor">
-            <a:schemeClr val="lt1"/>
-          </a:fontRef>
-        </p:style>
-        <p:txBody>
-          <a:bodyPr rtlCol="0" anchor="ctr"/>
-          <a:lstStyle/>
-          <a:p>
-            <a:pPr algn="ctr"/>
-            <a:r>
-              <a:rPr sz="1500" b="1">
-                <a:solidFill>
-                  <a:srgbClr val="0D1B2A"/>
-                </a:solidFill>
-              </a:rPr>
-              <a:t>F1-Macro</a:t>
-            </a:r>
-          </a:p>
-        </p:txBody>
-      </p:sp>
-      <p:sp>
-        <p:nvSpPr>
-          <p:cNvPr id="8" name="Rectangle 7"/>
-          <p:cNvSpPr/>
-          <p:nvPr/>
-        </p:nvSpPr>
-        <p:spPr>
-          <a:xfrm>
-            <a:off x="8869680" y="1554480"/>
-            <a:ext cx="2743200" cy="457200"/>
-          </a:xfrm>
-          <a:prstGeom prst="rect">
-            <a:avLst/>
-          </a:prstGeom>
-          <a:solidFill>
-            <a:srgbClr val="00B4D8"/>
-          </a:solidFill>
-          <a:ln>
-            <a:noFill/>
-          </a:ln>
-        </p:spPr>
-        <p:style>
-          <a:lnRef idx="1">
-            <a:schemeClr val="accent1"/>
-          </a:lnRef>
-          <a:fillRef idx="3">
-            <a:schemeClr val="accent1"/>
-          </a:fillRef>
-          <a:effectRef idx="2">
-            <a:schemeClr val="accent1"/>
-          </a:effectRef>
-          <a:fontRef idx="minor">
-            <a:schemeClr val="lt1"/>
-          </a:fontRef>
-        </p:style>
-        <p:txBody>
-          <a:bodyPr rtlCol="0" anchor="ctr"/>
-          <a:lstStyle/>
-          <a:p>
-            <a:pPr algn="ctr"/>
-            <a:r>
-              <a:rPr sz="1500" b="1">
-                <a:solidFill>
-                  <a:srgbClr val="0D1B2A"/>
-                </a:solidFill>
-              </a:rPr>
-              <a:t>ROC-AUC</a:t>
-            </a:r>
-          </a:p>
-        </p:txBody>
-      </p:sp>
-      <p:sp>
-        <p:nvSpPr>
-          <p:cNvPr id="9" name="Rectangle 8"/>
-          <p:cNvSpPr/>
-          <p:nvPr/>
-        </p:nvSpPr>
-        <p:spPr>
-          <a:xfrm>
-            <a:off x="365760" y="2103120"/>
-            <a:ext cx="2743200" cy="685800"/>
-          </a:xfrm>
-          <a:prstGeom prst="rect">
-            <a:avLst/>
-          </a:prstGeom>
-          <a:solidFill>
-            <a:srgbClr val="0A3A1A"/>
-          </a:solidFill>
-          <a:ln>
-            <a:solidFill>
-              <a:srgbClr val="334455"/>
-            </a:solidFill>
-          </a:ln>
-        </p:spPr>
-        <p:style>
-          <a:lnRef idx="1">
-            <a:schemeClr val="accent1"/>
-          </a:lnRef>
-          <a:fillRef idx="3">
-            <a:schemeClr val="accent1"/>
-          </a:fillRef>
-          <a:effectRef idx="2">
-            <a:schemeClr val="accent1"/>
-          </a:effectRef>
-          <a:fontRef idx="minor">
-            <a:schemeClr val="lt1"/>
-          </a:fontRef>
-        </p:style>
-        <p:txBody>
-          <a:bodyPr rtlCol="0" anchor="ctr"/>
-          <a:lstStyle/>
-          <a:p>
-            <a:pPr algn="ctr"/>
-            <a:r>
-              <a:rPr sz="1600" b="1">
-                <a:solidFill>
-                  <a:srgbClr val="2ECC71"/>
-                </a:solidFill>
-              </a:rPr>
-              <a:t>Random Forest</a:t>
-            </a:r>
-          </a:p>
-        </p:txBody>
-      </p:sp>
-      <p:sp>
-        <p:nvSpPr>
-          <p:cNvPr id="10" name="Rectangle 9"/>
-          <p:cNvSpPr/>
-          <p:nvPr/>
-        </p:nvSpPr>
-        <p:spPr>
-          <a:xfrm>
-            <a:off x="3200400" y="2103120"/>
-            <a:ext cx="2743200" cy="685800"/>
-          </a:xfrm>
-          <a:prstGeom prst="rect">
-            <a:avLst/>
-          </a:prstGeom>
-          <a:solidFill>
-            <a:srgbClr val="0A3A1A"/>
-          </a:solidFill>
-          <a:ln>
-            <a:solidFill>
-              <a:srgbClr val="334455"/>
-            </a:solidFill>
-          </a:ln>
-        </p:spPr>
-        <p:style>
-          <a:lnRef idx="1">
-            <a:schemeClr val="accent1"/>
-          </a:lnRef>
-          <a:fillRef idx="3">
-            <a:schemeClr val="accent1"/>
-          </a:fillRef>
-          <a:effectRef idx="2">
-            <a:schemeClr val="accent1"/>
-          </a:effectRef>
-          <a:fontRef idx="minor">
-            <a:schemeClr val="lt1"/>
-          </a:fontRef>
-        </p:style>
-        <p:txBody>
-          <a:bodyPr rtlCol="0" anchor="ctr"/>
-          <a:lstStyle/>
-          <a:p>
-            <a:pPr algn="ctr"/>
-            <a:r>
-              <a:rPr sz="1600" b="1">
-                <a:solidFill>
-                  <a:srgbClr val="FFFFFF"/>
-                </a:solidFill>
-              </a:rPr>
-              <a:t>96.0%</a:t>
-            </a:r>
-          </a:p>
-        </p:txBody>
-      </p:sp>
-      <p:sp>
-        <p:nvSpPr>
-          <p:cNvPr id="11" name="Rectangle 10"/>
-          <p:cNvSpPr/>
-          <p:nvPr/>
-        </p:nvSpPr>
-        <p:spPr>
-          <a:xfrm>
-            <a:off x="6035040" y="2103120"/>
-            <a:ext cx="2743200" cy="685800"/>
-          </a:xfrm>
-          <a:prstGeom prst="rect">
-            <a:avLst/>
-          </a:prstGeom>
-          <a:solidFill>
-            <a:srgbClr val="0A3A1A"/>
-          </a:solidFill>
-          <a:ln>
-            <a:solidFill>
-              <a:srgbClr val="334455"/>
-            </a:solidFill>
-          </a:ln>
-        </p:spPr>
-        <p:style>
-          <a:lnRef idx="1">
-            <a:schemeClr val="accent1"/>
-          </a:lnRef>
-          <a:fillRef idx="3">
-            <a:schemeClr val="accent1"/>
-          </a:fillRef>
-          <a:effectRef idx="2">
-            <a:schemeClr val="accent1"/>
-          </a:effectRef>
-          <a:fontRef idx="minor">
-            <a:schemeClr val="lt1"/>
-          </a:fontRef>
-        </p:style>
-        <p:txBody>
-          <a:bodyPr rtlCol="0" anchor="ctr"/>
-          <a:lstStyle/>
-          <a:p>
-            <a:pPr algn="ctr"/>
-            <a:r>
-              <a:rPr sz="1600" b="1">
-                <a:solidFill>
-                  <a:srgbClr val="FFFFFF"/>
-                </a:solidFill>
-              </a:rPr>
-              <a:t>93.6%</a:t>
-            </a:r>
-          </a:p>
-        </p:txBody>
-      </p:sp>
-      <p:sp>
-        <p:nvSpPr>
-          <p:cNvPr id="12" name="Rectangle 11"/>
-          <p:cNvSpPr/>
-          <p:nvPr/>
-        </p:nvSpPr>
-        <p:spPr>
-          <a:xfrm>
-            <a:off x="8869680" y="2103120"/>
-            <a:ext cx="2743200" cy="685800"/>
-          </a:xfrm>
-          <a:prstGeom prst="rect">
-            <a:avLst/>
-          </a:prstGeom>
-          <a:solidFill>
-            <a:srgbClr val="0A3A1A"/>
-          </a:solidFill>
-          <a:ln>
-            <a:solidFill>
-              <a:srgbClr val="334455"/>
-            </a:solidFill>
-          </a:ln>
-        </p:spPr>
-        <p:style>
-          <a:lnRef idx="1">
-            <a:schemeClr val="accent1"/>
-          </a:lnRef>
-          <a:fillRef idx="3">
-            <a:schemeClr val="accent1"/>
-          </a:fillRef>
-          <a:effectRef idx="2">
-            <a:schemeClr val="accent1"/>
-          </a:effectRef>
-          <a:fontRef idx="minor">
-            <a:schemeClr val="lt1"/>
-          </a:fontRef>
-        </p:style>
-        <p:txBody>
-          <a:bodyPr rtlCol="0" anchor="ctr"/>
-          <a:lstStyle/>
-          <a:p>
-            <a:pPr algn="ctr"/>
-            <a:r>
-              <a:rPr sz="1600" b="1">
-                <a:solidFill>
-                  <a:srgbClr val="FFFFFF"/>
-                </a:solidFill>
-              </a:rPr>
-              <a:t>98.9%</a:t>
-            </a:r>
-          </a:p>
-        </p:txBody>
-      </p:sp>
-      <p:sp>
-        <p:nvSpPr>
-          <p:cNvPr id="13" name="TextBox 12"/>
+          </a:p>
+        </p:txBody>
+      </p:sp>
+      <p:sp>
+        <p:nvSpPr>
+          <p:cNvPr id="7" name="TextBox 6"/>
           <p:cNvSpPr txBox="1"/>
           <p:nvPr/>
         </p:nvSpPr>
         <p:spPr>
           <a:xfrm>
-            <a:off x="11475720" y="2148840"/>
-            <a:ext cx="640080" cy="548640"/>
+            <a:off x="6355080" y="1508760"/>
+            <a:ext cx="5303520" cy="4754880"/>
           </a:xfrm>
           <a:prstGeom prst="rect">
             <a:avLst/>
@@ -5430,506 +5449,25 @@
           </a:bodyPr>
           <a:lstStyle/>
           <a:p>
-            <a:pPr algn="ctr"/>
-            <a:r>
-              <a:rPr sz="1300" b="1">
-                <a:solidFill>
-                  <a:srgbClr val="2ECC71"/>
-                </a:solidFill>
-              </a:rPr>
-              <a:t>BEST</a:t>
-            </a:r>
-          </a:p>
-        </p:txBody>
-      </p:sp>
-      <p:sp>
-        <p:nvSpPr>
-          <p:cNvPr id="14" name="Rectangle 13"/>
-          <p:cNvSpPr/>
-          <p:nvPr/>
-        </p:nvSpPr>
-        <p:spPr>
-          <a:xfrm>
-            <a:off x="365760" y="2880360"/>
-            <a:ext cx="2743200" cy="685800"/>
-          </a:xfrm>
-          <a:prstGeom prst="rect">
-            <a:avLst/>
-          </a:prstGeom>
-          <a:solidFill>
-            <a:srgbClr val="1A2A3A"/>
-          </a:solidFill>
-          <a:ln>
-            <a:solidFill>
-              <a:srgbClr val="334455"/>
-            </a:solidFill>
-          </a:ln>
-        </p:spPr>
-        <p:style>
-          <a:lnRef idx="1">
-            <a:schemeClr val="accent1"/>
-          </a:lnRef>
-          <a:fillRef idx="3">
-            <a:schemeClr val="accent1"/>
-          </a:fillRef>
-          <a:effectRef idx="2">
-            <a:schemeClr val="accent1"/>
-          </a:effectRef>
-          <a:fontRef idx="minor">
-            <a:schemeClr val="lt1"/>
-          </a:fontRef>
-        </p:style>
-        <p:txBody>
-          <a:bodyPr rtlCol="0" anchor="ctr"/>
-          <a:lstStyle/>
-          <a:p>
-            <a:pPr algn="ctr"/>
-            <a:r>
-              <a:rPr sz="1600" b="0">
-                <a:solidFill>
-                  <a:srgbClr val="F39C12"/>
-                </a:solidFill>
-              </a:rPr>
-              <a:t>Gradient Boosting</a:t>
-            </a:r>
-          </a:p>
-        </p:txBody>
-      </p:sp>
-      <p:sp>
-        <p:nvSpPr>
-          <p:cNvPr id="15" name="Rectangle 14"/>
-          <p:cNvSpPr/>
-          <p:nvPr/>
-        </p:nvSpPr>
-        <p:spPr>
-          <a:xfrm>
-            <a:off x="3200400" y="2880360"/>
-            <a:ext cx="2743200" cy="685800"/>
-          </a:xfrm>
-          <a:prstGeom prst="rect">
-            <a:avLst/>
-          </a:prstGeom>
-          <a:solidFill>
-            <a:srgbClr val="1A2A3A"/>
-          </a:solidFill>
-          <a:ln>
-            <a:solidFill>
-              <a:srgbClr val="334455"/>
-            </a:solidFill>
-          </a:ln>
-        </p:spPr>
-        <p:style>
-          <a:lnRef idx="1">
-            <a:schemeClr val="accent1"/>
-          </a:lnRef>
-          <a:fillRef idx="3">
-            <a:schemeClr val="accent1"/>
-          </a:fillRef>
-          <a:effectRef idx="2">
-            <a:schemeClr val="accent1"/>
-          </a:effectRef>
-          <a:fontRef idx="minor">
-            <a:schemeClr val="lt1"/>
-          </a:fontRef>
-        </p:style>
-        <p:txBody>
-          <a:bodyPr rtlCol="0" anchor="ctr"/>
-          <a:lstStyle/>
-          <a:p>
-            <a:pPr algn="ctr"/>
-            <a:r>
-              <a:rPr sz="1600" b="0">
+            <a:pPr algn="l"/>
+            <a:r>
+              <a:rPr sz="1400" b="0">
                 <a:solidFill>
                   <a:srgbClr val="FFFFFF"/>
                 </a:solidFill>
               </a:rPr>
-              <a:t>95.5%</a:t>
-            </a:r>
-          </a:p>
-        </p:txBody>
-      </p:sp>
-      <p:sp>
-        <p:nvSpPr>
-          <p:cNvPr id="16" name="Rectangle 15"/>
-          <p:cNvSpPr/>
-          <p:nvPr/>
-        </p:nvSpPr>
-        <p:spPr>
-          <a:xfrm>
-            <a:off x="6035040" y="2880360"/>
-            <a:ext cx="2743200" cy="685800"/>
-          </a:xfrm>
-          <a:prstGeom prst="rect">
-            <a:avLst/>
-          </a:prstGeom>
-          <a:solidFill>
-            <a:srgbClr val="1A2A3A"/>
-          </a:solidFill>
-          <a:ln>
-            <a:solidFill>
-              <a:srgbClr val="334455"/>
-            </a:solidFill>
-          </a:ln>
-        </p:spPr>
-        <p:style>
-          <a:lnRef idx="1">
-            <a:schemeClr val="accent1"/>
-          </a:lnRef>
-          <a:fillRef idx="3">
-            <a:schemeClr val="accent1"/>
-          </a:fillRef>
-          <a:effectRef idx="2">
-            <a:schemeClr val="accent1"/>
-          </a:effectRef>
-          <a:fontRef idx="minor">
-            <a:schemeClr val="lt1"/>
-          </a:fontRef>
-        </p:style>
-        <p:txBody>
-          <a:bodyPr rtlCol="0" anchor="ctr"/>
-          <a:lstStyle/>
-          <a:p>
-            <a:pPr algn="ctr"/>
-            <a:r>
-              <a:rPr sz="1600" b="0">
-                <a:solidFill>
-                  <a:srgbClr val="FFFFFF"/>
-                </a:solidFill>
-              </a:rPr>
-              <a:t>91.5%</a:t>
-            </a:r>
-          </a:p>
-        </p:txBody>
-      </p:sp>
-      <p:sp>
-        <p:nvSpPr>
-          <p:cNvPr id="17" name="Rectangle 16"/>
-          <p:cNvSpPr/>
-          <p:nvPr/>
-        </p:nvSpPr>
-        <p:spPr>
-          <a:xfrm>
-            <a:off x="8869680" y="2880360"/>
-            <a:ext cx="2743200" cy="685800"/>
-          </a:xfrm>
-          <a:prstGeom prst="rect">
-            <a:avLst/>
-          </a:prstGeom>
-          <a:solidFill>
-            <a:srgbClr val="1A2A3A"/>
-          </a:solidFill>
-          <a:ln>
-            <a:solidFill>
-              <a:srgbClr val="334455"/>
-            </a:solidFill>
-          </a:ln>
-        </p:spPr>
-        <p:style>
-          <a:lnRef idx="1">
-            <a:schemeClr val="accent1"/>
-          </a:lnRef>
-          <a:fillRef idx="3">
-            <a:schemeClr val="accent1"/>
-          </a:fillRef>
-          <a:effectRef idx="2">
-            <a:schemeClr val="accent1"/>
-          </a:effectRef>
-          <a:fontRef idx="minor">
-            <a:schemeClr val="lt1"/>
-          </a:fontRef>
-        </p:style>
-        <p:txBody>
-          <a:bodyPr rtlCol="0" anchor="ctr"/>
-          <a:lstStyle/>
-          <a:p>
-            <a:pPr algn="ctr"/>
-            <a:r>
-              <a:rPr sz="1600" b="0">
-                <a:solidFill>
-                  <a:srgbClr val="FFFFFF"/>
-                </a:solidFill>
-              </a:rPr>
-              <a:t>98.4%</a:t>
-            </a:r>
-          </a:p>
-        </p:txBody>
-      </p:sp>
-      <p:sp>
-        <p:nvSpPr>
-          <p:cNvPr id="18" name="Rectangle 17"/>
-          <p:cNvSpPr/>
-          <p:nvPr/>
-        </p:nvSpPr>
-        <p:spPr>
-          <a:xfrm>
-            <a:off x="365760" y="3657600"/>
-            <a:ext cx="2743200" cy="685800"/>
-          </a:xfrm>
-          <a:prstGeom prst="rect">
-            <a:avLst/>
-          </a:prstGeom>
-          <a:solidFill>
-            <a:srgbClr val="1A2A3A"/>
-          </a:solidFill>
-          <a:ln>
-            <a:solidFill>
-              <a:srgbClr val="334455"/>
-            </a:solidFill>
-          </a:ln>
-        </p:spPr>
-        <p:style>
-          <a:lnRef idx="1">
-            <a:schemeClr val="accent1"/>
-          </a:lnRef>
-          <a:fillRef idx="3">
-            <a:schemeClr val="accent1"/>
-          </a:fillRef>
-          <a:effectRef idx="2">
-            <a:schemeClr val="accent1"/>
-          </a:effectRef>
-          <a:fontRef idx="minor">
-            <a:schemeClr val="lt1"/>
-          </a:fontRef>
-        </p:style>
-        <p:txBody>
-          <a:bodyPr rtlCol="0" anchor="ctr"/>
-          <a:lstStyle/>
-          <a:p>
-            <a:pPr algn="ctr"/>
-            <a:r>
-              <a:rPr sz="1600" b="0">
-                <a:solidFill>
-                  <a:srgbClr val="E74C3C"/>
-                </a:solidFill>
-              </a:rPr>
-              <a:t>Logistic Regression</a:t>
-            </a:r>
-          </a:p>
-        </p:txBody>
-      </p:sp>
-      <p:sp>
-        <p:nvSpPr>
-          <p:cNvPr id="19" name="Rectangle 18"/>
-          <p:cNvSpPr/>
-          <p:nvPr/>
-        </p:nvSpPr>
-        <p:spPr>
-          <a:xfrm>
-            <a:off x="3200400" y="3657600"/>
-            <a:ext cx="2743200" cy="685800"/>
-          </a:xfrm>
-          <a:prstGeom prst="rect">
-            <a:avLst/>
-          </a:prstGeom>
-          <a:solidFill>
-            <a:srgbClr val="1A2A3A"/>
-          </a:solidFill>
-          <a:ln>
-            <a:solidFill>
-              <a:srgbClr val="334455"/>
-            </a:solidFill>
-          </a:ln>
-        </p:spPr>
-        <p:style>
-          <a:lnRef idx="1">
-            <a:schemeClr val="accent1"/>
-          </a:lnRef>
-          <a:fillRef idx="3">
-            <a:schemeClr val="accent1"/>
-          </a:fillRef>
-          <a:effectRef idx="2">
-            <a:schemeClr val="accent1"/>
-          </a:effectRef>
-          <a:fontRef idx="minor">
-            <a:schemeClr val="lt1"/>
-          </a:fontRef>
-        </p:style>
-        <p:txBody>
-          <a:bodyPr rtlCol="0" anchor="ctr"/>
-          <a:lstStyle/>
-          <a:p>
-            <a:pPr algn="ctr"/>
-            <a:r>
-              <a:rPr sz="1600" b="0">
-                <a:solidFill>
-                  <a:srgbClr val="FFFFFF"/>
-                </a:solidFill>
-              </a:rPr>
-              <a:t>87.3%</a:t>
-            </a:r>
-          </a:p>
-        </p:txBody>
-      </p:sp>
-      <p:sp>
-        <p:nvSpPr>
-          <p:cNvPr id="20" name="Rectangle 19"/>
-          <p:cNvSpPr/>
-          <p:nvPr/>
-        </p:nvSpPr>
-        <p:spPr>
-          <a:xfrm>
-            <a:off x="6035040" y="3657600"/>
-            <a:ext cx="2743200" cy="685800"/>
-          </a:xfrm>
-          <a:prstGeom prst="rect">
-            <a:avLst/>
-          </a:prstGeom>
-          <a:solidFill>
-            <a:srgbClr val="1A2A3A"/>
-          </a:solidFill>
-          <a:ln>
-            <a:solidFill>
-              <a:srgbClr val="334455"/>
-            </a:solidFill>
-          </a:ln>
-        </p:spPr>
-        <p:style>
-          <a:lnRef idx="1">
-            <a:schemeClr val="accent1"/>
-          </a:lnRef>
-          <a:fillRef idx="3">
-            <a:schemeClr val="accent1"/>
-          </a:fillRef>
-          <a:effectRef idx="2">
-            <a:schemeClr val="accent1"/>
-          </a:effectRef>
-          <a:fontRef idx="minor">
-            <a:schemeClr val="lt1"/>
-          </a:fontRef>
-        </p:style>
-        <p:txBody>
-          <a:bodyPr rtlCol="0" anchor="ctr"/>
-          <a:lstStyle/>
-          <a:p>
-            <a:pPr algn="ctr"/>
-            <a:r>
-              <a:rPr sz="1600" b="0">
-                <a:solidFill>
-                  <a:srgbClr val="FFFFFF"/>
-                </a:solidFill>
-              </a:rPr>
-              <a:t>79.6%</a:t>
-            </a:r>
-          </a:p>
-        </p:txBody>
-      </p:sp>
-      <p:sp>
-        <p:nvSpPr>
-          <p:cNvPr id="21" name="Rectangle 20"/>
-          <p:cNvSpPr/>
-          <p:nvPr/>
-        </p:nvSpPr>
-        <p:spPr>
-          <a:xfrm>
-            <a:off x="8869680" y="3657600"/>
-            <a:ext cx="2743200" cy="685800"/>
-          </a:xfrm>
-          <a:prstGeom prst="rect">
-            <a:avLst/>
-          </a:prstGeom>
-          <a:solidFill>
-            <a:srgbClr val="1A2A3A"/>
-          </a:solidFill>
-          <a:ln>
-            <a:solidFill>
-              <a:srgbClr val="334455"/>
-            </a:solidFill>
-          </a:ln>
-        </p:spPr>
-        <p:style>
-          <a:lnRef idx="1">
-            <a:schemeClr val="accent1"/>
-          </a:lnRef>
-          <a:fillRef idx="3">
-            <a:schemeClr val="accent1"/>
-          </a:fillRef>
-          <a:effectRef idx="2">
-            <a:schemeClr val="accent1"/>
-          </a:effectRef>
-          <a:fontRef idx="minor">
-            <a:schemeClr val="lt1"/>
-          </a:fontRef>
-        </p:style>
-        <p:txBody>
-          <a:bodyPr rtlCol="0" anchor="ctr"/>
-          <a:lstStyle/>
-          <a:p>
-            <a:pPr algn="ctr"/>
-            <a:r>
-              <a:rPr sz="1600" b="0">
-                <a:solidFill>
-                  <a:srgbClr val="FFFFFF"/>
-                </a:solidFill>
-              </a:rPr>
-              <a:t>96.9%</a:t>
-            </a:r>
-          </a:p>
-        </p:txBody>
-      </p:sp>
-      <p:sp>
-        <p:nvSpPr>
-          <p:cNvPr id="22" name="TextBox 21"/>
-          <p:cNvSpPr txBox="1"/>
-          <p:nvPr/>
-        </p:nvSpPr>
-        <p:spPr>
-          <a:xfrm>
-            <a:off x="457200" y="4663440"/>
-            <a:ext cx="10972800" cy="457200"/>
-          </a:xfrm>
-          <a:prstGeom prst="rect">
-            <a:avLst/>
-          </a:prstGeom>
-          <a:noFill/>
-        </p:spPr>
-        <p:txBody>
-          <a:bodyPr wrap="square">
-            <a:spAutoFit/>
-          </a:bodyPr>
-          <a:lstStyle/>
-          <a:p>
-            <a:pPr algn="l"/>
-            <a:r>
-              <a:rPr sz="1400" b="0">
-                <a:solidFill>
-                  <a:srgbClr val="AABBCC"/>
-                </a:solidFill>
-              </a:rPr>
-              <a:t>Metrica principal: F1-Macro (adequada para classes desbalanceadas: 77.8% Normal / 13.9% Suspect / 8.3% Pathological)</a:t>
-            </a:r>
-          </a:p>
-        </p:txBody>
-      </p:sp>
-      <p:sp>
-        <p:nvSpPr>
-          <p:cNvPr id="23" name="TextBox 22"/>
-          <p:cNvSpPr txBox="1"/>
-          <p:nvPr/>
-        </p:nvSpPr>
-        <p:spPr>
-          <a:xfrm>
-            <a:off x="457200" y="5212080"/>
-            <a:ext cx="10972800" cy="457200"/>
-          </a:xfrm>
-          <a:prstGeom prst="rect">
-            <a:avLst/>
-          </a:prstGeom>
-          <a:noFill/>
-        </p:spPr>
-        <p:txBody>
-          <a:bodyPr wrap="square">
-            <a:spAutoFit/>
-          </a:bodyPr>
-          <a:lstStyle/>
-          <a:p>
-            <a:pPr algn="l"/>
-            <a:r>
-              <a:rPr sz="1400" b="0">
-                <a:solidFill>
-                  <a:srgbClr val="AABBCC"/>
-                </a:solidFill>
-              </a:rPr>
-              <a:t>Parametros versionados em params.yaml — integrados ao pipeline DVC para reproducibilidade total</a:t>
+              <a:t>Por que o DagsHub?
+O DagsHub e uma plataforma feita especificamente para projetos de ML.
+Ele faz duas coisas ao mesmo tempo:
+  1. Hospeda o storage do DVC
+     (como um S3 gratuito para os dados)
+  2. Hospeda o servidor do MLflow
+     (para rastrear os experimentos)
+Isso significa que, se voce clonar o meu repo e rodar:
+     dvc pull
+voce baixa exatamente os mesmos dados
+que eu usei para treinar o modelo.
+Reproducibilidade real, nao so no papel.</a:t>
             </a:r>
           </a:p>
         </p:txBody>
@@ -5968,8 +5506,8 @@
         </p:nvSpPr>
         <p:spPr>
           <a:xfrm>
-            <a:off x="0" y="164592"/>
-            <a:ext cx="12188952" cy="64008"/>
+            <a:off x="0" y="201168"/>
+            <a:ext cx="12188952" cy="54864"/>
           </a:xfrm>
           <a:prstGeom prst="rect">
             <a:avLst/>
@@ -6012,7 +5550,7 @@
         <p:spPr>
           <a:xfrm>
             <a:off x="457200" y="365760"/>
-            <a:ext cx="10972800" cy="548640"/>
+            <a:ext cx="10972800" cy="502920"/>
           </a:xfrm>
           <a:prstGeom prst="rect">
             <a:avLst/>
@@ -6027,12 +5565,12 @@
           <a:p>
             <a:pPr algn="l"/>
             <a:r>
-              <a:rPr sz="3200" b="1">
+              <a:rPr sz="3000" b="1">
                 <a:solidFill>
                   <a:srgbClr val="00B4D8"/>
                 </a:solidFill>
               </a:rPr>
-              <a:t>Aplicacao Streamlit</a:t>
+              <a:t>Treinamento e Experimentacao com MLflow</a:t>
             </a:r>
           </a:p>
         </p:txBody>
@@ -6045,8 +5583,8 @@
         </p:nvSpPr>
         <p:spPr>
           <a:xfrm>
-            <a:off x="457200" y="1005840"/>
-            <a:ext cx="10972800" cy="365760"/>
+            <a:off x="457200" y="960120"/>
+            <a:ext cx="10972800" cy="320040"/>
           </a:xfrm>
           <a:prstGeom prst="rect">
             <a:avLst/>
@@ -6061,12 +5599,12 @@
           <a:p>
             <a:pPr algn="l"/>
             <a:r>
-              <a:rPr sz="2000" b="1">
-                <a:solidFill>
-                  <a:srgbClr val="2ECC71"/>
-                </a:solidFill>
-              </a:rPr>
-              <a:t>aula08-projeto-final.onrender.com</a:t>
+              <a:rPr sz="1500" b="0">
+                <a:solidFill>
+                  <a:srgbClr val="AABBCC"/>
+                </a:solidFill>
+              </a:rPr>
+              <a:t>Treinei 3 modelos diferentes e comparei as metricas — o MLflow salvou tudo automaticamente no DagsHub.</a:t>
             </a:r>
           </a:p>
         </p:txBody>
@@ -6079,8 +5617,579 @@
         </p:nvSpPr>
         <p:spPr>
           <a:xfrm>
-            <a:off x="365760" y="1554480"/>
-            <a:ext cx="3657600" cy="4572000"/>
+            <a:off x="365760" y="1417320"/>
+            <a:ext cx="2880360" cy="457200"/>
+          </a:xfrm>
+          <a:prstGeom prst="rect">
+            <a:avLst/>
+          </a:prstGeom>
+          <a:solidFill>
+            <a:srgbClr val="00B4D8"/>
+          </a:solidFill>
+          <a:ln>
+            <a:noFill/>
+          </a:ln>
+        </p:spPr>
+        <p:style>
+          <a:lnRef idx="1">
+            <a:schemeClr val="accent1"/>
+          </a:lnRef>
+          <a:fillRef idx="3">
+            <a:schemeClr val="accent1"/>
+          </a:fillRef>
+          <a:effectRef idx="2">
+            <a:schemeClr val="accent1"/>
+          </a:effectRef>
+          <a:fontRef idx="minor">
+            <a:schemeClr val="lt1"/>
+          </a:fontRef>
+        </p:style>
+        <p:txBody>
+          <a:bodyPr rtlCol="0" anchor="ctr"/>
+          <a:lstStyle/>
+          <a:p>
+            <a:pPr algn="ctr"/>
+            <a:r>
+              <a:rPr sz="1300" b="1">
+                <a:solidFill>
+                  <a:srgbClr val="0D1B2A"/>
+                </a:solidFill>
+              </a:rPr>
+              <a:t>Modelo</a:t>
+            </a:r>
+          </a:p>
+        </p:txBody>
+      </p:sp>
+      <p:sp>
+        <p:nvSpPr>
+          <p:cNvPr id="6" name="Rectangle 5"/>
+          <p:cNvSpPr/>
+          <p:nvPr/>
+        </p:nvSpPr>
+        <p:spPr>
+          <a:xfrm>
+            <a:off x="3291840" y="1417320"/>
+            <a:ext cx="1508760" cy="457200"/>
+          </a:xfrm>
+          <a:prstGeom prst="rect">
+            <a:avLst/>
+          </a:prstGeom>
+          <a:solidFill>
+            <a:srgbClr val="00B4D8"/>
+          </a:solidFill>
+          <a:ln>
+            <a:noFill/>
+          </a:ln>
+        </p:spPr>
+        <p:style>
+          <a:lnRef idx="1">
+            <a:schemeClr val="accent1"/>
+          </a:lnRef>
+          <a:fillRef idx="3">
+            <a:schemeClr val="accent1"/>
+          </a:fillRef>
+          <a:effectRef idx="2">
+            <a:schemeClr val="accent1"/>
+          </a:effectRef>
+          <a:fontRef idx="minor">
+            <a:schemeClr val="lt1"/>
+          </a:fontRef>
+        </p:style>
+        <p:txBody>
+          <a:bodyPr rtlCol="0" anchor="ctr"/>
+          <a:lstStyle/>
+          <a:p>
+            <a:pPr algn="ctr"/>
+            <a:r>
+              <a:rPr sz="1300" b="1">
+                <a:solidFill>
+                  <a:srgbClr val="0D1B2A"/>
+                </a:solidFill>
+              </a:rPr>
+              <a:t>Accuracy</a:t>
+            </a:r>
+          </a:p>
+        </p:txBody>
+      </p:sp>
+      <p:sp>
+        <p:nvSpPr>
+          <p:cNvPr id="7" name="Rectangle 6"/>
+          <p:cNvSpPr/>
+          <p:nvPr/>
+        </p:nvSpPr>
+        <p:spPr>
+          <a:xfrm>
+            <a:off x="4846320" y="1417320"/>
+            <a:ext cx="1508760" cy="457200"/>
+          </a:xfrm>
+          <a:prstGeom prst="rect">
+            <a:avLst/>
+          </a:prstGeom>
+          <a:solidFill>
+            <a:srgbClr val="00B4D8"/>
+          </a:solidFill>
+          <a:ln>
+            <a:noFill/>
+          </a:ln>
+        </p:spPr>
+        <p:style>
+          <a:lnRef idx="1">
+            <a:schemeClr val="accent1"/>
+          </a:lnRef>
+          <a:fillRef idx="3">
+            <a:schemeClr val="accent1"/>
+          </a:fillRef>
+          <a:effectRef idx="2">
+            <a:schemeClr val="accent1"/>
+          </a:effectRef>
+          <a:fontRef idx="minor">
+            <a:schemeClr val="lt1"/>
+          </a:fontRef>
+        </p:style>
+        <p:txBody>
+          <a:bodyPr rtlCol="0" anchor="ctr"/>
+          <a:lstStyle/>
+          <a:p>
+            <a:pPr algn="ctr"/>
+            <a:r>
+              <a:rPr sz="1300" b="1">
+                <a:solidFill>
+                  <a:srgbClr val="0D1B2A"/>
+                </a:solidFill>
+              </a:rPr>
+              <a:t>F1-Macro</a:t>
+            </a:r>
+          </a:p>
+        </p:txBody>
+      </p:sp>
+      <p:sp>
+        <p:nvSpPr>
+          <p:cNvPr id="8" name="Rectangle 7"/>
+          <p:cNvSpPr/>
+          <p:nvPr/>
+        </p:nvSpPr>
+        <p:spPr>
+          <a:xfrm>
+            <a:off x="6400800" y="1417320"/>
+            <a:ext cx="1508760" cy="457200"/>
+          </a:xfrm>
+          <a:prstGeom prst="rect">
+            <a:avLst/>
+          </a:prstGeom>
+          <a:solidFill>
+            <a:srgbClr val="00B4D8"/>
+          </a:solidFill>
+          <a:ln>
+            <a:noFill/>
+          </a:ln>
+        </p:spPr>
+        <p:style>
+          <a:lnRef idx="1">
+            <a:schemeClr val="accent1"/>
+          </a:lnRef>
+          <a:fillRef idx="3">
+            <a:schemeClr val="accent1"/>
+          </a:fillRef>
+          <a:effectRef idx="2">
+            <a:schemeClr val="accent1"/>
+          </a:effectRef>
+          <a:fontRef idx="minor">
+            <a:schemeClr val="lt1"/>
+          </a:fontRef>
+        </p:style>
+        <p:txBody>
+          <a:bodyPr rtlCol="0" anchor="ctr"/>
+          <a:lstStyle/>
+          <a:p>
+            <a:pPr algn="ctr"/>
+            <a:r>
+              <a:rPr sz="1300" b="1">
+                <a:solidFill>
+                  <a:srgbClr val="0D1B2A"/>
+                </a:solidFill>
+              </a:rPr>
+              <a:t>ROC-AUC</a:t>
+            </a:r>
+          </a:p>
+        </p:txBody>
+      </p:sp>
+      <p:sp>
+        <p:nvSpPr>
+          <p:cNvPr id="9" name="Rectangle 8"/>
+          <p:cNvSpPr/>
+          <p:nvPr/>
+        </p:nvSpPr>
+        <p:spPr>
+          <a:xfrm>
+            <a:off x="7955279" y="1417320"/>
+            <a:ext cx="4069080" cy="457200"/>
+          </a:xfrm>
+          <a:prstGeom prst="rect">
+            <a:avLst/>
+          </a:prstGeom>
+          <a:solidFill>
+            <a:srgbClr val="00B4D8"/>
+          </a:solidFill>
+          <a:ln>
+            <a:noFill/>
+          </a:ln>
+        </p:spPr>
+        <p:style>
+          <a:lnRef idx="1">
+            <a:schemeClr val="accent1"/>
+          </a:lnRef>
+          <a:fillRef idx="3">
+            <a:schemeClr val="accent1"/>
+          </a:fillRef>
+          <a:effectRef idx="2">
+            <a:schemeClr val="accent1"/>
+          </a:effectRef>
+          <a:fontRef idx="minor">
+            <a:schemeClr val="lt1"/>
+          </a:fontRef>
+        </p:style>
+        <p:txBody>
+          <a:bodyPr rtlCol="0" anchor="ctr"/>
+          <a:lstStyle/>
+          <a:p>
+            <a:pPr algn="ctr"/>
+            <a:r>
+              <a:rPr sz="1300" b="1">
+                <a:solidFill>
+                  <a:srgbClr val="0D1B2A"/>
+                </a:solidFill>
+              </a:rPr>
+              <a:t>Observacao</a:t>
+            </a:r>
+          </a:p>
+        </p:txBody>
+      </p:sp>
+      <p:sp>
+        <p:nvSpPr>
+          <p:cNvPr id="10" name="Rectangle 9"/>
+          <p:cNvSpPr/>
+          <p:nvPr/>
+        </p:nvSpPr>
+        <p:spPr>
+          <a:xfrm>
+            <a:off x="365760" y="1965960"/>
+            <a:ext cx="2880360" cy="868680"/>
+          </a:xfrm>
+          <a:prstGeom prst="rect">
+            <a:avLst/>
+          </a:prstGeom>
+          <a:solidFill>
+            <a:srgbClr val="0A3518"/>
+          </a:solidFill>
+          <a:ln>
+            <a:solidFill>
+              <a:srgbClr val="334455"/>
+            </a:solidFill>
+          </a:ln>
+        </p:spPr>
+        <p:style>
+          <a:lnRef idx="1">
+            <a:schemeClr val="accent1"/>
+          </a:lnRef>
+          <a:fillRef idx="3">
+            <a:schemeClr val="accent1"/>
+          </a:fillRef>
+          <a:effectRef idx="2">
+            <a:schemeClr val="accent1"/>
+          </a:effectRef>
+          <a:fontRef idx="minor">
+            <a:schemeClr val="lt1"/>
+          </a:fontRef>
+        </p:style>
+        <p:txBody>
+          <a:bodyPr rtlCol="0" anchor="ctr" wrap="square"/>
+          <a:lstStyle/>
+          <a:p>
+            <a:pPr algn="ctr"/>
+            <a:r>
+              <a:rPr sz="1300" b="1">
+                <a:solidFill>
+                  <a:srgbClr val="2ECC71"/>
+                </a:solidFill>
+              </a:rPr>
+              <a:t>Random Forest</a:t>
+            </a:r>
+          </a:p>
+        </p:txBody>
+      </p:sp>
+      <p:sp>
+        <p:nvSpPr>
+          <p:cNvPr id="11" name="Rectangle 10"/>
+          <p:cNvSpPr/>
+          <p:nvPr/>
+        </p:nvSpPr>
+        <p:spPr>
+          <a:xfrm>
+            <a:off x="3291840" y="1965960"/>
+            <a:ext cx="1508760" cy="868680"/>
+          </a:xfrm>
+          <a:prstGeom prst="rect">
+            <a:avLst/>
+          </a:prstGeom>
+          <a:solidFill>
+            <a:srgbClr val="0A3518"/>
+          </a:solidFill>
+          <a:ln>
+            <a:solidFill>
+              <a:srgbClr val="334455"/>
+            </a:solidFill>
+          </a:ln>
+        </p:spPr>
+        <p:style>
+          <a:lnRef idx="1">
+            <a:schemeClr val="accent1"/>
+          </a:lnRef>
+          <a:fillRef idx="3">
+            <a:schemeClr val="accent1"/>
+          </a:fillRef>
+          <a:effectRef idx="2">
+            <a:schemeClr val="accent1"/>
+          </a:effectRef>
+          <a:fontRef idx="minor">
+            <a:schemeClr val="lt1"/>
+          </a:fontRef>
+        </p:style>
+        <p:txBody>
+          <a:bodyPr rtlCol="0" anchor="ctr" wrap="square"/>
+          <a:lstStyle/>
+          <a:p>
+            <a:pPr algn="ctr"/>
+            <a:r>
+              <a:rPr sz="1300" b="0">
+                <a:solidFill>
+                  <a:srgbClr val="FFFFFF"/>
+                </a:solidFill>
+              </a:rPr>
+              <a:t>96.0%</a:t>
+            </a:r>
+          </a:p>
+        </p:txBody>
+      </p:sp>
+      <p:sp>
+        <p:nvSpPr>
+          <p:cNvPr id="12" name="Rectangle 11"/>
+          <p:cNvSpPr/>
+          <p:nvPr/>
+        </p:nvSpPr>
+        <p:spPr>
+          <a:xfrm>
+            <a:off x="4846320" y="1965960"/>
+            <a:ext cx="1508760" cy="868680"/>
+          </a:xfrm>
+          <a:prstGeom prst="rect">
+            <a:avLst/>
+          </a:prstGeom>
+          <a:solidFill>
+            <a:srgbClr val="0A3518"/>
+          </a:solidFill>
+          <a:ln>
+            <a:solidFill>
+              <a:srgbClr val="334455"/>
+            </a:solidFill>
+          </a:ln>
+        </p:spPr>
+        <p:style>
+          <a:lnRef idx="1">
+            <a:schemeClr val="accent1"/>
+          </a:lnRef>
+          <a:fillRef idx="3">
+            <a:schemeClr val="accent1"/>
+          </a:fillRef>
+          <a:effectRef idx="2">
+            <a:schemeClr val="accent1"/>
+          </a:effectRef>
+          <a:fontRef idx="minor">
+            <a:schemeClr val="lt1"/>
+          </a:fontRef>
+        </p:style>
+        <p:txBody>
+          <a:bodyPr rtlCol="0" anchor="ctr" wrap="square"/>
+          <a:lstStyle/>
+          <a:p>
+            <a:pPr algn="ctr"/>
+            <a:r>
+              <a:rPr sz="1300" b="0">
+                <a:solidFill>
+                  <a:srgbClr val="FFFFFF"/>
+                </a:solidFill>
+              </a:rPr>
+              <a:t>93.6%</a:t>
+            </a:r>
+          </a:p>
+        </p:txBody>
+      </p:sp>
+      <p:sp>
+        <p:nvSpPr>
+          <p:cNvPr id="13" name="Rectangle 12"/>
+          <p:cNvSpPr/>
+          <p:nvPr/>
+        </p:nvSpPr>
+        <p:spPr>
+          <a:xfrm>
+            <a:off x="6400800" y="1965960"/>
+            <a:ext cx="1508760" cy="868680"/>
+          </a:xfrm>
+          <a:prstGeom prst="rect">
+            <a:avLst/>
+          </a:prstGeom>
+          <a:solidFill>
+            <a:srgbClr val="0A3518"/>
+          </a:solidFill>
+          <a:ln>
+            <a:solidFill>
+              <a:srgbClr val="334455"/>
+            </a:solidFill>
+          </a:ln>
+        </p:spPr>
+        <p:style>
+          <a:lnRef idx="1">
+            <a:schemeClr val="accent1"/>
+          </a:lnRef>
+          <a:fillRef idx="3">
+            <a:schemeClr val="accent1"/>
+          </a:fillRef>
+          <a:effectRef idx="2">
+            <a:schemeClr val="accent1"/>
+          </a:effectRef>
+          <a:fontRef idx="minor">
+            <a:schemeClr val="lt1"/>
+          </a:fontRef>
+        </p:style>
+        <p:txBody>
+          <a:bodyPr rtlCol="0" anchor="ctr" wrap="square"/>
+          <a:lstStyle/>
+          <a:p>
+            <a:pPr algn="ctr"/>
+            <a:r>
+              <a:rPr sz="1300" b="0">
+                <a:solidFill>
+                  <a:srgbClr val="FFFFFF"/>
+                </a:solidFill>
+              </a:rPr>
+              <a:t>98.9%</a:t>
+            </a:r>
+          </a:p>
+        </p:txBody>
+      </p:sp>
+      <p:sp>
+        <p:nvSpPr>
+          <p:cNvPr id="14" name="Rectangle 13"/>
+          <p:cNvSpPr/>
+          <p:nvPr/>
+        </p:nvSpPr>
+        <p:spPr>
+          <a:xfrm>
+            <a:off x="7955279" y="1965960"/>
+            <a:ext cx="4069080" cy="868680"/>
+          </a:xfrm>
+          <a:prstGeom prst="rect">
+            <a:avLst/>
+          </a:prstGeom>
+          <a:solidFill>
+            <a:srgbClr val="0A3518"/>
+          </a:solidFill>
+          <a:ln>
+            <a:solidFill>
+              <a:srgbClr val="334455"/>
+            </a:solidFill>
+          </a:ln>
+        </p:spPr>
+        <p:style>
+          <a:lnRef idx="1">
+            <a:schemeClr val="accent1"/>
+          </a:lnRef>
+          <a:fillRef idx="3">
+            <a:schemeClr val="accent1"/>
+          </a:fillRef>
+          <a:effectRef idx="2">
+            <a:schemeClr val="accent1"/>
+          </a:effectRef>
+          <a:fontRef idx="minor">
+            <a:schemeClr val="lt1"/>
+          </a:fontRef>
+        </p:style>
+        <p:txBody>
+          <a:bodyPr rtlCol="0" anchor="ctr" wrap="square"/>
+          <a:lstStyle/>
+          <a:p>
+            <a:pPr algn="ctr"/>
+            <a:r>
+              <a:rPr sz="1200" b="0">
+                <a:solidFill>
+                  <a:srgbClr val="FFFFFF"/>
+                </a:solidFill>
+              </a:rPr>
+              <a:t>Melhor em tudo. Robusto, interpreta bem dados desbalanceados com class_weight.</a:t>
+            </a:r>
+          </a:p>
+        </p:txBody>
+      </p:sp>
+      <p:sp>
+        <p:nvSpPr>
+          <p:cNvPr id="15" name="Rectangle 14"/>
+          <p:cNvSpPr/>
+          <p:nvPr/>
+        </p:nvSpPr>
+        <p:spPr>
+          <a:xfrm>
+            <a:off x="12024359" y="2011679"/>
+            <a:ext cx="502920" cy="411480"/>
+          </a:xfrm>
+          <a:prstGeom prst="rect">
+            <a:avLst/>
+          </a:prstGeom>
+          <a:solidFill>
+            <a:srgbClr val="2ECC71"/>
+          </a:solidFill>
+          <a:ln>
+            <a:noFill/>
+          </a:ln>
+        </p:spPr>
+        <p:style>
+          <a:lnRef idx="1">
+            <a:schemeClr val="accent1"/>
+          </a:lnRef>
+          <a:fillRef idx="3">
+            <a:schemeClr val="accent1"/>
+          </a:fillRef>
+          <a:effectRef idx="2">
+            <a:schemeClr val="accent1"/>
+          </a:effectRef>
+          <a:fontRef idx="minor">
+            <a:schemeClr val="lt1"/>
+          </a:fontRef>
+        </p:style>
+        <p:txBody>
+          <a:bodyPr rtlCol="0" anchor="ctr"/>
+          <a:lstStyle/>
+          <a:p>
+            <a:pPr algn="ctr"/>
+            <a:r>
+              <a:rPr sz="1000" b="1">
+                <a:solidFill>
+                  <a:srgbClr val="0D1B2A"/>
+                </a:solidFill>
+              </a:rPr>
+              <a:t>WIN</a:t>
+            </a:r>
+          </a:p>
+        </p:txBody>
+      </p:sp>
+      <p:sp>
+        <p:nvSpPr>
+          <p:cNvPr id="16" name="Rectangle 15"/>
+          <p:cNvSpPr/>
+          <p:nvPr/>
+        </p:nvSpPr>
+        <p:spPr>
+          <a:xfrm>
+            <a:off x="365760" y="2926080"/>
+            <a:ext cx="2880360" cy="868680"/>
           </a:xfrm>
           <a:prstGeom prst="rect">
             <a:avLst/>
@@ -6090,7 +6199,7 @@
           </a:solidFill>
           <a:ln>
             <a:solidFill>
-              <a:srgbClr val="00B4D8"/>
+              <a:srgbClr val="334455"/>
             </a:solidFill>
           </a:ln>
         </p:spPr>
@@ -6112,32 +6221,28 @@
           <a:bodyPr rtlCol="0" anchor="ctr" wrap="square"/>
           <a:lstStyle/>
           <a:p>
-            <a:pPr algn="l"/>
-            <a:r>
-              <a:rPr sz="1500">
-                <a:solidFill>
-                  <a:srgbClr val="FFFFFF"/>
-                </a:solidFill>
-              </a:rPr>
-              <a:t>Aba Predicao
-21 inputs do exame CTG
-Botao Classificar
-Gauges de probabilidade por classe
-(Normal / Suspect / Pathological)</a:t>
-            </a:r>
-          </a:p>
-        </p:txBody>
-      </p:sp>
-      <p:sp>
-        <p:nvSpPr>
-          <p:cNvPr id="6" name="Rectangle 5"/>
+            <a:pPr algn="ctr"/>
+            <a:r>
+              <a:rPr sz="1300" b="0">
+                <a:solidFill>
+                  <a:srgbClr val="F39C12"/>
+                </a:solidFill>
+              </a:rPr>
+              <a:t>Gradient Boosting</a:t>
+            </a:r>
+          </a:p>
+        </p:txBody>
+      </p:sp>
+      <p:sp>
+        <p:nvSpPr>
+          <p:cNvPr id="17" name="Rectangle 16"/>
           <p:cNvSpPr/>
           <p:nvPr/>
         </p:nvSpPr>
         <p:spPr>
           <a:xfrm>
-            <a:off x="4297680" y="1554480"/>
-            <a:ext cx="3657600" cy="4572000"/>
+            <a:off x="3291840" y="2926080"/>
+            <a:ext cx="1508760" cy="868680"/>
           </a:xfrm>
           <a:prstGeom prst="rect">
             <a:avLst/>
@@ -6147,7 +6252,7 @@
           </a:solidFill>
           <a:ln>
             <a:solidFill>
-              <a:srgbClr val="00B4D8"/>
+              <a:srgbClr val="334455"/>
             </a:solidFill>
           </a:ln>
         </p:spPr>
@@ -6169,32 +6274,28 @@
           <a:bodyPr rtlCol="0" anchor="ctr" wrap="square"/>
           <a:lstStyle/>
           <a:p>
-            <a:pPr algn="l"/>
-            <a:r>
-              <a:rPr sz="1500">
+            <a:pPr algn="ctr"/>
+            <a:r>
+              <a:rPr sz="1300" b="0">
                 <a:solidFill>
                   <a:srgbClr val="FFFFFF"/>
                 </a:solidFill>
               </a:rPr>
-              <a:t>Aba Exploracao
-Dados carregados do Supabase
-Grafico de pizza das classes
-Boxplot por feature e classe
-Estatisticas descritivas</a:t>
-            </a:r>
-          </a:p>
-        </p:txBody>
-      </p:sp>
-      <p:sp>
-        <p:nvSpPr>
-          <p:cNvPr id="7" name="Rectangle 6"/>
+              <a:t>95.5%</a:t>
+            </a:r>
+          </a:p>
+        </p:txBody>
+      </p:sp>
+      <p:sp>
+        <p:nvSpPr>
+          <p:cNvPr id="18" name="Rectangle 17"/>
           <p:cNvSpPr/>
           <p:nvPr/>
         </p:nvSpPr>
         <p:spPr>
           <a:xfrm>
-            <a:off x="8229600" y="1554480"/>
-            <a:ext cx="3657600" cy="4572000"/>
+            <a:off x="4846320" y="2926080"/>
+            <a:ext cx="1508760" cy="868680"/>
           </a:xfrm>
           <a:prstGeom prst="rect">
             <a:avLst/>
@@ -6204,7 +6305,7 @@
           </a:solidFill>
           <a:ln>
             <a:solidFill>
-              <a:srgbClr val="00B4D8"/>
+              <a:srgbClr val="334455"/>
             </a:solidFill>
           </a:ln>
         </p:spPr>
@@ -6226,18 +6327,454 @@
           <a:bodyPr rtlCol="0" anchor="ctr" wrap="square"/>
           <a:lstStyle/>
           <a:p>
+            <a:pPr algn="ctr"/>
+            <a:r>
+              <a:rPr sz="1300" b="0">
+                <a:solidFill>
+                  <a:srgbClr val="FFFFFF"/>
+                </a:solidFill>
+              </a:rPr>
+              <a:t>91.5%</a:t>
+            </a:r>
+          </a:p>
+        </p:txBody>
+      </p:sp>
+      <p:sp>
+        <p:nvSpPr>
+          <p:cNvPr id="19" name="Rectangle 18"/>
+          <p:cNvSpPr/>
+          <p:nvPr/>
+        </p:nvSpPr>
+        <p:spPr>
+          <a:xfrm>
+            <a:off x="6400800" y="2926080"/>
+            <a:ext cx="1508760" cy="868680"/>
+          </a:xfrm>
+          <a:prstGeom prst="rect">
+            <a:avLst/>
+          </a:prstGeom>
+          <a:solidFill>
+            <a:srgbClr val="1A2A3A"/>
+          </a:solidFill>
+          <a:ln>
+            <a:solidFill>
+              <a:srgbClr val="334455"/>
+            </a:solidFill>
+          </a:ln>
+        </p:spPr>
+        <p:style>
+          <a:lnRef idx="1">
+            <a:schemeClr val="accent1"/>
+          </a:lnRef>
+          <a:fillRef idx="3">
+            <a:schemeClr val="accent1"/>
+          </a:fillRef>
+          <a:effectRef idx="2">
+            <a:schemeClr val="accent1"/>
+          </a:effectRef>
+          <a:fontRef idx="minor">
+            <a:schemeClr val="lt1"/>
+          </a:fontRef>
+        </p:style>
+        <p:txBody>
+          <a:bodyPr rtlCol="0" anchor="ctr" wrap="square"/>
+          <a:lstStyle/>
+          <a:p>
+            <a:pPr algn="ctr"/>
+            <a:r>
+              <a:rPr sz="1300" b="0">
+                <a:solidFill>
+                  <a:srgbClr val="FFFFFF"/>
+                </a:solidFill>
+              </a:rPr>
+              <a:t>98.4%</a:t>
+            </a:r>
+          </a:p>
+        </p:txBody>
+      </p:sp>
+      <p:sp>
+        <p:nvSpPr>
+          <p:cNvPr id="20" name="Rectangle 19"/>
+          <p:cNvSpPr/>
+          <p:nvPr/>
+        </p:nvSpPr>
+        <p:spPr>
+          <a:xfrm>
+            <a:off x="7955279" y="2926080"/>
+            <a:ext cx="4069080" cy="868680"/>
+          </a:xfrm>
+          <a:prstGeom prst="rect">
+            <a:avLst/>
+          </a:prstGeom>
+          <a:solidFill>
+            <a:srgbClr val="1A2A3A"/>
+          </a:solidFill>
+          <a:ln>
+            <a:solidFill>
+              <a:srgbClr val="334455"/>
+            </a:solidFill>
+          </a:ln>
+        </p:spPr>
+        <p:style>
+          <a:lnRef idx="1">
+            <a:schemeClr val="accent1"/>
+          </a:lnRef>
+          <a:fillRef idx="3">
+            <a:schemeClr val="accent1"/>
+          </a:fillRef>
+          <a:effectRef idx="2">
+            <a:schemeClr val="accent1"/>
+          </a:effectRef>
+          <a:fontRef idx="minor">
+            <a:schemeClr val="lt1"/>
+          </a:fontRef>
+        </p:style>
+        <p:txBody>
+          <a:bodyPr rtlCol="0" anchor="ctr" wrap="square"/>
+          <a:lstStyle/>
+          <a:p>
+            <a:pPr algn="ctr"/>
+            <a:r>
+              <a:rPr sz="1200" b="0">
+                <a:solidFill>
+                  <a:srgbClr val="FFFFFF"/>
+                </a:solidFill>
+              </a:rPr>
+              <a:t>Muito proximo do RF, mas treinamento mais lento e sem ajuste de peso por classe.</a:t>
+            </a:r>
+          </a:p>
+        </p:txBody>
+      </p:sp>
+      <p:sp>
+        <p:nvSpPr>
+          <p:cNvPr id="21" name="Rectangle 20"/>
+          <p:cNvSpPr/>
+          <p:nvPr/>
+        </p:nvSpPr>
+        <p:spPr>
+          <a:xfrm>
+            <a:off x="365760" y="3886200"/>
+            <a:ext cx="2880360" cy="868680"/>
+          </a:xfrm>
+          <a:prstGeom prst="rect">
+            <a:avLst/>
+          </a:prstGeom>
+          <a:solidFill>
+            <a:srgbClr val="1A2A3A"/>
+          </a:solidFill>
+          <a:ln>
+            <a:solidFill>
+              <a:srgbClr val="334455"/>
+            </a:solidFill>
+          </a:ln>
+        </p:spPr>
+        <p:style>
+          <a:lnRef idx="1">
+            <a:schemeClr val="accent1"/>
+          </a:lnRef>
+          <a:fillRef idx="3">
+            <a:schemeClr val="accent1"/>
+          </a:fillRef>
+          <a:effectRef idx="2">
+            <a:schemeClr val="accent1"/>
+          </a:effectRef>
+          <a:fontRef idx="minor">
+            <a:schemeClr val="lt1"/>
+          </a:fontRef>
+        </p:style>
+        <p:txBody>
+          <a:bodyPr rtlCol="0" anchor="ctr" wrap="square"/>
+          <a:lstStyle/>
+          <a:p>
+            <a:pPr algn="ctr"/>
+            <a:r>
+              <a:rPr sz="1300" b="0">
+                <a:solidFill>
+                  <a:srgbClr val="E74C3C"/>
+                </a:solidFill>
+              </a:rPr>
+              <a:t>Logistic Regression</a:t>
+            </a:r>
+          </a:p>
+        </p:txBody>
+      </p:sp>
+      <p:sp>
+        <p:nvSpPr>
+          <p:cNvPr id="22" name="Rectangle 21"/>
+          <p:cNvSpPr/>
+          <p:nvPr/>
+        </p:nvSpPr>
+        <p:spPr>
+          <a:xfrm>
+            <a:off x="3291840" y="3886200"/>
+            <a:ext cx="1508760" cy="868680"/>
+          </a:xfrm>
+          <a:prstGeom prst="rect">
+            <a:avLst/>
+          </a:prstGeom>
+          <a:solidFill>
+            <a:srgbClr val="1A2A3A"/>
+          </a:solidFill>
+          <a:ln>
+            <a:solidFill>
+              <a:srgbClr val="334455"/>
+            </a:solidFill>
+          </a:ln>
+        </p:spPr>
+        <p:style>
+          <a:lnRef idx="1">
+            <a:schemeClr val="accent1"/>
+          </a:lnRef>
+          <a:fillRef idx="3">
+            <a:schemeClr val="accent1"/>
+          </a:fillRef>
+          <a:effectRef idx="2">
+            <a:schemeClr val="accent1"/>
+          </a:effectRef>
+          <a:fontRef idx="minor">
+            <a:schemeClr val="lt1"/>
+          </a:fontRef>
+        </p:style>
+        <p:txBody>
+          <a:bodyPr rtlCol="0" anchor="ctr" wrap="square"/>
+          <a:lstStyle/>
+          <a:p>
+            <a:pPr algn="ctr"/>
+            <a:r>
+              <a:rPr sz="1300" b="0">
+                <a:solidFill>
+                  <a:srgbClr val="FFFFFF"/>
+                </a:solidFill>
+              </a:rPr>
+              <a:t>87.3%</a:t>
+            </a:r>
+          </a:p>
+        </p:txBody>
+      </p:sp>
+      <p:sp>
+        <p:nvSpPr>
+          <p:cNvPr id="23" name="Rectangle 22"/>
+          <p:cNvSpPr/>
+          <p:nvPr/>
+        </p:nvSpPr>
+        <p:spPr>
+          <a:xfrm>
+            <a:off x="4846320" y="3886200"/>
+            <a:ext cx="1508760" cy="868680"/>
+          </a:xfrm>
+          <a:prstGeom prst="rect">
+            <a:avLst/>
+          </a:prstGeom>
+          <a:solidFill>
+            <a:srgbClr val="1A2A3A"/>
+          </a:solidFill>
+          <a:ln>
+            <a:solidFill>
+              <a:srgbClr val="334455"/>
+            </a:solidFill>
+          </a:ln>
+        </p:spPr>
+        <p:style>
+          <a:lnRef idx="1">
+            <a:schemeClr val="accent1"/>
+          </a:lnRef>
+          <a:fillRef idx="3">
+            <a:schemeClr val="accent1"/>
+          </a:fillRef>
+          <a:effectRef idx="2">
+            <a:schemeClr val="accent1"/>
+          </a:effectRef>
+          <a:fontRef idx="minor">
+            <a:schemeClr val="lt1"/>
+          </a:fontRef>
+        </p:style>
+        <p:txBody>
+          <a:bodyPr rtlCol="0" anchor="ctr" wrap="square"/>
+          <a:lstStyle/>
+          <a:p>
+            <a:pPr algn="ctr"/>
+            <a:r>
+              <a:rPr sz="1300" b="0">
+                <a:solidFill>
+                  <a:srgbClr val="FFFFFF"/>
+                </a:solidFill>
+              </a:rPr>
+              <a:t>79.6%</a:t>
+            </a:r>
+          </a:p>
+        </p:txBody>
+      </p:sp>
+      <p:sp>
+        <p:nvSpPr>
+          <p:cNvPr id="24" name="Rectangle 23"/>
+          <p:cNvSpPr/>
+          <p:nvPr/>
+        </p:nvSpPr>
+        <p:spPr>
+          <a:xfrm>
+            <a:off x="6400800" y="3886200"/>
+            <a:ext cx="1508760" cy="868680"/>
+          </a:xfrm>
+          <a:prstGeom prst="rect">
+            <a:avLst/>
+          </a:prstGeom>
+          <a:solidFill>
+            <a:srgbClr val="1A2A3A"/>
+          </a:solidFill>
+          <a:ln>
+            <a:solidFill>
+              <a:srgbClr val="334455"/>
+            </a:solidFill>
+          </a:ln>
+        </p:spPr>
+        <p:style>
+          <a:lnRef idx="1">
+            <a:schemeClr val="accent1"/>
+          </a:lnRef>
+          <a:fillRef idx="3">
+            <a:schemeClr val="accent1"/>
+          </a:fillRef>
+          <a:effectRef idx="2">
+            <a:schemeClr val="accent1"/>
+          </a:effectRef>
+          <a:fontRef idx="minor">
+            <a:schemeClr val="lt1"/>
+          </a:fontRef>
+        </p:style>
+        <p:txBody>
+          <a:bodyPr rtlCol="0" anchor="ctr" wrap="square"/>
+          <a:lstStyle/>
+          <a:p>
+            <a:pPr algn="ctr"/>
+            <a:r>
+              <a:rPr sz="1300" b="0">
+                <a:solidFill>
+                  <a:srgbClr val="FFFFFF"/>
+                </a:solidFill>
+              </a:rPr>
+              <a:t>96.9%</a:t>
+            </a:r>
+          </a:p>
+        </p:txBody>
+      </p:sp>
+      <p:sp>
+        <p:nvSpPr>
+          <p:cNvPr id="25" name="Rectangle 24"/>
+          <p:cNvSpPr/>
+          <p:nvPr/>
+        </p:nvSpPr>
+        <p:spPr>
+          <a:xfrm>
+            <a:off x="7955279" y="3886200"/>
+            <a:ext cx="4069080" cy="868680"/>
+          </a:xfrm>
+          <a:prstGeom prst="rect">
+            <a:avLst/>
+          </a:prstGeom>
+          <a:solidFill>
+            <a:srgbClr val="1A2A3A"/>
+          </a:solidFill>
+          <a:ln>
+            <a:solidFill>
+              <a:srgbClr val="334455"/>
+            </a:solidFill>
+          </a:ln>
+        </p:spPr>
+        <p:style>
+          <a:lnRef idx="1">
+            <a:schemeClr val="accent1"/>
+          </a:lnRef>
+          <a:fillRef idx="3">
+            <a:schemeClr val="accent1"/>
+          </a:fillRef>
+          <a:effectRef idx="2">
+            <a:schemeClr val="accent1"/>
+          </a:effectRef>
+          <a:fontRef idx="minor">
+            <a:schemeClr val="lt1"/>
+          </a:fontRef>
+        </p:style>
+        <p:txBody>
+          <a:bodyPr rtlCol="0" anchor="ctr" wrap="square"/>
+          <a:lstStyle/>
+          <a:p>
+            <a:pPr algn="ctr"/>
+            <a:r>
+              <a:rPr sz="1200" b="0">
+                <a:solidFill>
+                  <a:srgbClr val="FFFFFF"/>
+                </a:solidFill>
+              </a:rPr>
+              <a:t>Baseline linear. Util para comparar — mostra que o problema nao e linearmente separavel.</a:t>
+            </a:r>
+          </a:p>
+        </p:txBody>
+      </p:sp>
+      <p:sp>
+        <p:nvSpPr>
+          <p:cNvPr id="26" name="TextBox 25"/>
+          <p:cNvSpPr txBox="1"/>
+          <p:nvPr/>
+        </p:nvSpPr>
+        <p:spPr>
+          <a:xfrm>
+            <a:off x="457200" y="4892040"/>
+            <a:ext cx="10972800" cy="411480"/>
+          </a:xfrm>
+          <a:prstGeom prst="rect">
+            <a:avLst/>
+          </a:prstGeom>
+          <a:noFill/>
+        </p:spPr>
+        <p:txBody>
+          <a:bodyPr wrap="square">
+            <a:spAutoFit/>
+          </a:bodyPr>
+          <a:lstStyle/>
+          <a:p>
             <a:pPr algn="l"/>
             <a:r>
-              <a:rPr sz="1500">
+              <a:rPr sz="1600" b="1">
+                <a:solidFill>
+                  <a:srgbClr val="00B4D8"/>
+                </a:solidFill>
+              </a:rPr>
+              <a:t>Por que F1-Macro e a metrica principal?</a:t>
+            </a:r>
+          </a:p>
+        </p:txBody>
+      </p:sp>
+      <p:sp>
+        <p:nvSpPr>
+          <p:cNvPr id="27" name="TextBox 26"/>
+          <p:cNvSpPr txBox="1"/>
+          <p:nvPr/>
+        </p:nvSpPr>
+        <p:spPr>
+          <a:xfrm>
+            <a:off x="457200" y="5349240"/>
+            <a:ext cx="10972800" cy="1188720"/>
+          </a:xfrm>
+          <a:prstGeom prst="rect">
+            <a:avLst/>
+          </a:prstGeom>
+          <a:noFill/>
+        </p:spPr>
+        <p:txBody>
+          <a:bodyPr wrap="square">
+            <a:spAutoFit/>
+          </a:bodyPr>
+          <a:lstStyle/>
+          <a:p>
+            <a:pPr algn="l"/>
+            <a:r>
+              <a:rPr sz="1400" b="0">
                 <a:solidFill>
                   <a:srgbClr val="FFFFFF"/>
                 </a:solidFill>
               </a:rPr>
-              <a:t>Aba Sobre
-Descricao do problema
-Arquitetura do pipeline
-Tabela de resultados dos modelos
-Stack tecnica completa</a:t>
+              <a:t>Accuracy seria enganosa aqui: se o modelo chutasse 'Normal' pra tudo, acertaria 77.8% — mas deixaria passar todos os casos Pathological.
+F1-Macro trata todas as classes igualmente, penalizando erros na classe minoritaria. E o que importa clinicamente.</a:t>
             </a:r>
           </a:p>
         </p:txBody>
@@ -6276,8 +6813,8 @@
         </p:nvSpPr>
         <p:spPr>
           <a:xfrm>
-            <a:off x="0" y="164592"/>
-            <a:ext cx="12188952" cy="64008"/>
+            <a:off x="0" y="201168"/>
+            <a:ext cx="12188952" cy="54864"/>
           </a:xfrm>
           <a:prstGeom prst="rect">
             <a:avLst/>
@@ -6320,7 +6857,7 @@
         <p:spPr>
           <a:xfrm>
             <a:off x="457200" y="365760"/>
-            <a:ext cx="10972800" cy="548640"/>
+            <a:ext cx="10972800" cy="502920"/>
           </a:xfrm>
           <a:prstGeom prst="rect">
             <a:avLst/>
@@ -6335,26 +6872,60 @@
           <a:p>
             <a:pPr algn="l"/>
             <a:r>
-              <a:rPr sz="3200" b="1">
+              <a:rPr sz="3000" b="1">
                 <a:solidFill>
                   <a:srgbClr val="00B4D8"/>
                 </a:solidFill>
               </a:rPr>
-              <a:t>Deploy: Docker + Render</a:t>
-            </a:r>
-          </a:p>
-        </p:txBody>
-      </p:sp>
-      <p:sp>
-        <p:nvSpPr>
-          <p:cNvPr id="4" name="Rectangle 3"/>
+              <a:t>O App — Interface para usar o modelo</a:t>
+            </a:r>
+          </a:p>
+        </p:txBody>
+      </p:sp>
+      <p:sp>
+        <p:nvSpPr>
+          <p:cNvPr id="4" name="TextBox 3"/>
+          <p:cNvSpPr txBox="1"/>
+          <p:nvPr/>
+        </p:nvSpPr>
+        <p:spPr>
+          <a:xfrm>
+            <a:off x="457200" y="914400"/>
+            <a:ext cx="10972800" cy="365760"/>
+          </a:xfrm>
+          <a:prstGeom prst="rect">
+            <a:avLst/>
+          </a:prstGeom>
+          <a:noFill/>
+        </p:spPr>
+        <p:txBody>
+          <a:bodyPr wrap="square">
+            <a:spAutoFit/>
+          </a:bodyPr>
+          <a:lstStyle/>
+          <a:p>
+            <a:pPr algn="l"/>
+            <a:r>
+              <a:rPr sz="1700" b="1">
+                <a:solidFill>
+                  <a:srgbClr val="2ECC71"/>
+                </a:solidFill>
+              </a:rPr>
+              <a:t>aula08-projeto-final.onrender.com  —  publico, sem login, funciona agora</a:t>
+            </a:r>
+          </a:p>
+        </p:txBody>
+      </p:sp>
+      <p:sp>
+        <p:nvSpPr>
+          <p:cNvPr id="5" name="Rectangle 4"/>
           <p:cNvSpPr/>
           <p:nvPr/>
         </p:nvSpPr>
         <p:spPr>
           <a:xfrm>
-            <a:off x="365760" y="1097280"/>
-            <a:ext cx="3657600" cy="5303520"/>
+            <a:off x="365760" y="1417320"/>
+            <a:ext cx="3794760" cy="5212080"/>
           </a:xfrm>
           <a:prstGeom prst="rect">
             <a:avLst/>
@@ -6383,37 +6954,100 @@
           </a:fontRef>
         </p:style>
         <p:txBody>
-          <a:bodyPr rtlCol="0" anchor="ctr" wrap="square"/>
+          <a:bodyPr rtlCol="0" anchor="ctr"/>
           <a:lstStyle/>
           <a:p>
             <a:pPr algn="ctr"/>
-            <a:r>
-              <a:rPr sz="1500">
+          </a:p>
+        </p:txBody>
+      </p:sp>
+      <p:sp>
+        <p:nvSpPr>
+          <p:cNvPr id="6" name="TextBox 5"/>
+          <p:cNvSpPr txBox="1"/>
+          <p:nvPr/>
+        </p:nvSpPr>
+        <p:spPr>
+          <a:xfrm>
+            <a:off x="502920" y="1508760"/>
+            <a:ext cx="3566160" cy="457200"/>
+          </a:xfrm>
+          <a:prstGeom prst="rect">
+            <a:avLst/>
+          </a:prstGeom>
+          <a:noFill/>
+        </p:spPr>
+        <p:txBody>
+          <a:bodyPr wrap="square">
+            <a:spAutoFit/>
+          </a:bodyPr>
+          <a:lstStyle/>
+          <a:p>
+            <a:pPr algn="l"/>
+            <a:r>
+              <a:rPr sz="1600" b="1">
+                <a:solidFill>
+                  <a:srgbClr val="00B4D8"/>
+                </a:solidFill>
+              </a:rPr>
+              <a:t>Aba Predicao</a:t>
+            </a:r>
+          </a:p>
+        </p:txBody>
+      </p:sp>
+      <p:sp>
+        <p:nvSpPr>
+          <p:cNvPr id="7" name="TextBox 6"/>
+          <p:cNvSpPr txBox="1"/>
+          <p:nvPr/>
+        </p:nvSpPr>
+        <p:spPr>
+          <a:xfrm>
+            <a:off x="502920" y="2011680"/>
+            <a:ext cx="3566160" cy="4480560"/>
+          </a:xfrm>
+          <a:prstGeom prst="rect">
+            <a:avLst/>
+          </a:prstGeom>
+          <a:noFill/>
+        </p:spPr>
+        <p:txBody>
+          <a:bodyPr wrap="square">
+            <a:spAutoFit/>
+          </a:bodyPr>
+          <a:lstStyle/>
+          <a:p>
+            <a:pPr algn="l"/>
+            <a:r>
+              <a:rPr sz="1300" b="0">
                 <a:solidFill>
                   <a:srgbClr val="FFFFFF"/>
                 </a:solidFill>
               </a:rPr>
-              <a:t>DOCKERFILE
-• Base: python:3.11-slim
-• Instala requirements.txt
-• Copia codigo da aplicacao
-• Expoe porta dinamica $PORT
-• Testado localmente antes
-  do deploy</a:t>
-            </a:r>
-          </a:p>
-        </p:txBody>
-      </p:sp>
-      <p:sp>
-        <p:nvSpPr>
-          <p:cNvPr id="5" name="Rectangle 4"/>
+              <a:t>O medico (ou qualquer pessoa) preenche os valores
+do exame CTG no painel lateral — sao os mesmos 21
+campos que o modelo foi treinado para interpretar.
+Ao clicar em Classificar:
+  1. Os valores vao para o predict.py
+  2. O modelo (carregado do MLflow) faz a predicao
+  3. Aparecem 3 gauges com a probabilidade de cada
+     classe: Normal, Suspect, Pathological
+O modelo e carregado uma vez ao abrir o app e
+fica em cache — nao precisa baixar de novo.</a:t>
+            </a:r>
+          </a:p>
+        </p:txBody>
+      </p:sp>
+      <p:sp>
+        <p:nvSpPr>
+          <p:cNvPr id="8" name="Rectangle 7"/>
           <p:cNvSpPr/>
           <p:nvPr/>
         </p:nvSpPr>
         <p:spPr>
           <a:xfrm>
-            <a:off x="4297680" y="1097280"/>
-            <a:ext cx="3657600" cy="5303520"/>
+            <a:off x="4297680" y="1417320"/>
+            <a:ext cx="3794760" cy="5212080"/>
           </a:xfrm>
           <a:prstGeom prst="rect">
             <a:avLst/>
@@ -6442,39 +7076,100 @@
           </a:fontRef>
         </p:style>
         <p:txBody>
-          <a:bodyPr rtlCol="0" anchor="ctr" wrap="square"/>
+          <a:bodyPr rtlCol="0" anchor="ctr"/>
           <a:lstStyle/>
           <a:p>
             <a:pPr algn="ctr"/>
-            <a:r>
-              <a:rPr sz="1500">
+          </a:p>
+        </p:txBody>
+      </p:sp>
+      <p:sp>
+        <p:nvSpPr>
+          <p:cNvPr id="9" name="TextBox 8"/>
+          <p:cNvSpPr txBox="1"/>
+          <p:nvPr/>
+        </p:nvSpPr>
+        <p:spPr>
+          <a:xfrm>
+            <a:off x="4434840" y="1508760"/>
+            <a:ext cx="3566160" cy="457200"/>
+          </a:xfrm>
+          <a:prstGeom prst="rect">
+            <a:avLst/>
+          </a:prstGeom>
+          <a:noFill/>
+        </p:spPr>
+        <p:txBody>
+          <a:bodyPr wrap="square">
+            <a:spAutoFit/>
+          </a:bodyPr>
+          <a:lstStyle/>
+          <a:p>
+            <a:pPr algn="l"/>
+            <a:r>
+              <a:rPr sz="1600" b="1">
+                <a:solidFill>
+                  <a:srgbClr val="2ECC71"/>
+                </a:solidFill>
+              </a:rPr>
+              <a:t>Aba Exploracao de Dados</a:t>
+            </a:r>
+          </a:p>
+        </p:txBody>
+      </p:sp>
+      <p:sp>
+        <p:nvSpPr>
+          <p:cNvPr id="10" name="TextBox 9"/>
+          <p:cNvSpPr txBox="1"/>
+          <p:nvPr/>
+        </p:nvSpPr>
+        <p:spPr>
+          <a:xfrm>
+            <a:off x="4434840" y="2011680"/>
+            <a:ext cx="3566160" cy="4480560"/>
+          </a:xfrm>
+          <a:prstGeom prst="rect">
+            <a:avLst/>
+          </a:prstGeom>
+          <a:noFill/>
+        </p:spPr>
+        <p:txBody>
+          <a:bodyPr wrap="square">
+            <a:spAutoFit/>
+          </a:bodyPr>
+          <a:lstStyle/>
+          <a:p>
+            <a:pPr algn="l"/>
+            <a:r>
+              <a:rPr sz="1300" b="0">
                 <a:solidFill>
                   <a:srgbClr val="FFFFFF"/>
                 </a:solidFill>
               </a:rPr>
-              <a:t>RENDER
-• Web Service via Docker
-• Conectado ao GitHub
-• Deploy automatico a cada
-  push na branch main
-• Variaveis de ambiente
-  configuradas no painel
-• URL publica gerada
-  automaticamente</a:t>
-            </a:r>
-          </a:p>
-        </p:txBody>
-      </p:sp>
-      <p:sp>
-        <p:nvSpPr>
-          <p:cNvPr id="6" name="Rectangle 5"/>
+              <a:t>Os dados vem direto do Supabase em tempo real —
+nao e um CSV embutido no app.
+O que o usuario ve:
+  •  Distribuicao das 3 classes (grafico de pizza)
+  •  Boxplot interativo: escolhe qualquer feature
+     e ve como ela se distribui por classe
+  •  Tabela de estatisticas descritivas
+Isso mostra que features como 'abnormal_short_term_
+variability' sao muito mais altas nos casos
+Pathological — o modelo aprendeu isso.</a:t>
+            </a:r>
+          </a:p>
+        </p:txBody>
+      </p:sp>
+      <p:sp>
+        <p:nvSpPr>
+          <p:cNvPr id="11" name="Rectangle 10"/>
           <p:cNvSpPr/>
           <p:nvPr/>
         </p:nvSpPr>
         <p:spPr>
           <a:xfrm>
-            <a:off x="8229600" y="1097280"/>
-            <a:ext cx="3657600" cy="5303520"/>
+            <a:off x="8229600" y="1417320"/>
+            <a:ext cx="3794760" cy="5212080"/>
           </a:xfrm>
           <a:prstGeom prst="rect">
             <a:avLst/>
@@ -6503,23 +7198,84 @@
           </a:fontRef>
         </p:style>
         <p:txBody>
-          <a:bodyPr rtlCol="0" anchor="ctr" wrap="square"/>
+          <a:bodyPr rtlCol="0" anchor="ctr"/>
           <a:lstStyle/>
           <a:p>
             <a:pPr algn="ctr"/>
-            <a:r>
-              <a:rPr sz="1500">
+          </a:p>
+        </p:txBody>
+      </p:sp>
+      <p:sp>
+        <p:nvSpPr>
+          <p:cNvPr id="12" name="TextBox 11"/>
+          <p:cNvSpPr txBox="1"/>
+          <p:nvPr/>
+        </p:nvSpPr>
+        <p:spPr>
+          <a:xfrm>
+            <a:off x="8366760" y="1508760"/>
+            <a:ext cx="3566160" cy="457200"/>
+          </a:xfrm>
+          <a:prstGeom prst="rect">
+            <a:avLst/>
+          </a:prstGeom>
+          <a:noFill/>
+        </p:spPr>
+        <p:txBody>
+          <a:bodyPr wrap="square">
+            <a:spAutoFit/>
+          </a:bodyPr>
+          <a:lstStyle/>
+          <a:p>
+            <a:pPr algn="l"/>
+            <a:r>
+              <a:rPr sz="1600" b="1">
+                <a:solidFill>
+                  <a:srgbClr val="F39C12"/>
+                </a:solidFill>
+              </a:rPr>
+              <a:t>Aba Sobre o Projeto</a:t>
+            </a:r>
+          </a:p>
+        </p:txBody>
+      </p:sp>
+      <p:sp>
+        <p:nvSpPr>
+          <p:cNvPr id="13" name="TextBox 12"/>
+          <p:cNvSpPr txBox="1"/>
+          <p:nvPr/>
+        </p:nvSpPr>
+        <p:spPr>
+          <a:xfrm>
+            <a:off x="8366760" y="2011680"/>
+            <a:ext cx="3566160" cy="4480560"/>
+          </a:xfrm>
+          <a:prstGeom prst="rect">
+            <a:avLst/>
+          </a:prstGeom>
+          <a:noFill/>
+        </p:spPr>
+        <p:txBody>
+          <a:bodyPr wrap="square">
+            <a:spAutoFit/>
+          </a:bodyPr>
+          <a:lstStyle/>
+          <a:p>
+            <a:pPr algn="l"/>
+            <a:r>
+              <a:rPr sz="1300" b="0">
                 <a:solidFill>
                   <a:srgbClr val="FFFFFF"/>
                 </a:solidFill>
               </a:rPr>
-              <a:t>CI/CD
-• Push GitHub → build
-  automatico no Render
-• Sem intervencao manual
-• Plano gratuito (free tier)
-• Spin down em inatividade
-  (caracteristica do plano free)</a:t>
+              <a:t>Documentacao embutida no proprio app:
+  •  Descricao do problema
+  •  Diagrama da arquitetura
+  •  Tabela com resultados dos 3 modelos
+  •  Link para o repo no GitHub
+A ideia e que qualquer pessoa que abra o app
+entenda o que ele faz sem precisar ler o README.
+O app e auto-explicativo.</a:t>
             </a:r>
           </a:p>
         </p:txBody>
@@ -6558,8 +7314,8 @@
         </p:nvSpPr>
         <p:spPr>
           <a:xfrm>
-            <a:off x="0" y="164592"/>
-            <a:ext cx="12188952" cy="64008"/>
+            <a:off x="0" y="201168"/>
+            <a:ext cx="12188952" cy="54864"/>
           </a:xfrm>
           <a:prstGeom prst="rect">
             <a:avLst/>
@@ -6602,7 +7358,7 @@
         <p:spPr>
           <a:xfrm>
             <a:off x="457200" y="365760"/>
-            <a:ext cx="10972800" cy="548640"/>
+            <a:ext cx="10972800" cy="502920"/>
           </a:xfrm>
           <a:prstGeom prst="rect">
             <a:avLst/>
@@ -6617,12 +7373,12 @@
           <a:p>
             <a:pPr algn="l"/>
             <a:r>
-              <a:rPr sz="3200" b="1">
+              <a:rPr sz="3000" b="1">
                 <a:solidFill>
                   <a:srgbClr val="00B4D8"/>
                 </a:solidFill>
               </a:rPr>
-              <a:t>Resumo dos Entregaveis</a:t>
+              <a:t>Do meu computador para a internet — Docker e Render</a:t>
             </a:r>
           </a:p>
         </p:txBody>
@@ -6635,8 +7391,101 @@
         </p:nvSpPr>
         <p:spPr>
           <a:xfrm>
-            <a:off x="365760" y="1051560"/>
-            <a:ext cx="11338560" cy="594360"/>
+            <a:off x="365760" y="1005840"/>
+            <a:ext cx="5577840" cy="5394960"/>
+          </a:xfrm>
+          <a:prstGeom prst="rect">
+            <a:avLst/>
+          </a:prstGeom>
+          <a:solidFill>
+            <a:srgbClr val="1A2A3A"/>
+          </a:solidFill>
+          <a:ln>
+            <a:solidFill>
+              <a:srgbClr val="00B4D8"/>
+            </a:solidFill>
+          </a:ln>
+        </p:spPr>
+        <p:style>
+          <a:lnRef idx="1">
+            <a:schemeClr val="accent1"/>
+          </a:lnRef>
+          <a:fillRef idx="3">
+            <a:schemeClr val="accent1"/>
+          </a:fillRef>
+          <a:effectRef idx="2">
+            <a:schemeClr val="accent1"/>
+          </a:effectRef>
+          <a:fontRef idx="minor">
+            <a:schemeClr val="lt1"/>
+          </a:fontRef>
+        </p:style>
+        <p:txBody>
+          <a:bodyPr rtlCol="0" anchor="ctr"/>
+          <a:lstStyle/>
+          <a:p>
+            <a:pPr algn="ctr"/>
+          </a:p>
+        </p:txBody>
+      </p:sp>
+      <p:sp>
+        <p:nvSpPr>
+          <p:cNvPr id="5" name="TextBox 4"/>
+          <p:cNvSpPr txBox="1"/>
+          <p:nvPr/>
+        </p:nvSpPr>
+        <p:spPr>
+          <a:xfrm>
+            <a:off x="502920" y="1097280"/>
+            <a:ext cx="5303520" cy="5120640"/>
+          </a:xfrm>
+          <a:prstGeom prst="rect">
+            <a:avLst/>
+          </a:prstGeom>
+          <a:noFill/>
+        </p:spPr>
+        <p:txBody>
+          <a:bodyPr wrap="square">
+            <a:spAutoFit/>
+          </a:bodyPr>
+          <a:lstStyle/>
+          <a:p>
+            <a:pPr algn="l"/>
+            <a:r>
+              <a:rPr sz="1400" b="0">
+                <a:solidFill>
+                  <a:srgbClr val="FFFFFF"/>
+                </a:solidFill>
+              </a:rPr>
+              <a:t>DOCKER  —  empacotando tudo
+O problema sem Docker:
+'Na minha maquina funciona' — na do professor pode nao funcionar.
+O Dockerfile faz o seguinte:
+  1. Pega uma imagem limpa do Python 3.11
+  2. Instala todas as dependencias do requirements.txt
+  3. Copia o codigo do projeto
+  4. Define o comando de inicializacao:
+     streamlit run app/streamlit_app.py
+       --server.port=$PORT
+       --server.address=0.0.0.0
+A porta e dinamica ($PORT) porque o Render
+define qual porta usar — nao a gente.
+Testei localmente com  docker run  antes
+de subir — o app rodou identico.</a:t>
+            </a:r>
+          </a:p>
+        </p:txBody>
+      </p:sp>
+      <p:sp>
+        <p:nvSpPr>
+          <p:cNvPr id="6" name="Rectangle 5"/>
+          <p:cNvSpPr/>
+          <p:nvPr/>
+        </p:nvSpPr>
+        <p:spPr>
+          <a:xfrm>
+            <a:off x="6263640" y="1005840"/>
+            <a:ext cx="5577840" cy="5394960"/>
           </a:xfrm>
           <a:prstGeom prst="rect">
             <a:avLst/>
@@ -6669,35 +7518,172 @@
           <a:lstStyle/>
           <a:p>
             <a:pPr algn="ctr"/>
-            <a:r>
-              <a:rPr sz="1400" b="1">
-                <a:solidFill>
-                  <a:srgbClr val="2ECC71"/>
-                </a:solidFill>
-              </a:rPr>
-              <a:t>  GitHub / DagsHub   </a:t>
-            </a:r>
-            <a:r>
-              <a:rPr sz="1300">
+          </a:p>
+        </p:txBody>
+      </p:sp>
+      <p:sp>
+        <p:nvSpPr>
+          <p:cNvPr id="7" name="TextBox 6"/>
+          <p:cNvSpPr txBox="1"/>
+          <p:nvPr/>
+        </p:nvSpPr>
+        <p:spPr>
+          <a:xfrm>
+            <a:off x="6400800" y="1097280"/>
+            <a:ext cx="5303520" cy="5120640"/>
+          </a:xfrm>
+          <a:prstGeom prst="rect">
+            <a:avLst/>
+          </a:prstGeom>
+          <a:noFill/>
+        </p:spPr>
+        <p:txBody>
+          <a:bodyPr wrap="square">
+            <a:spAutoFit/>
+          </a:bodyPr>
+          <a:lstStyle/>
+          <a:p>
+            <a:pPr algn="l"/>
+            <a:r>
+              <a:rPr sz="1400" b="0">
                 <a:solidFill>
                   <a:srgbClr val="FFFFFF"/>
                 </a:solidFill>
               </a:rPr>
-              <a:t>Codigo + commits   |   github.com/kevloki/Aula08_Projeto_Final</a:t>
-            </a:r>
-          </a:p>
-        </p:txBody>
-      </p:sp>
-      <p:sp>
-        <p:nvSpPr>
-          <p:cNvPr id="5" name="Rectangle 4"/>
+              <a:t>RENDER  —  o deploy automatico
+Render e como um 'Heroku moderno' — conecta
+ao GitHub e faz o deploy automaticamente.
+Como configurei:
+  1. Conectei o repo GitHub ao Render
+  2. Escolhi 'Docker' como tipo de deploy
+  3. Adicionei as variaveis de ambiente no painel:
+     SUPABASE_URL, SUPABASE_KEY
+     DAGSHUB_TOKEN, MLFLOW_TRACKING_URI...
+A partir dai:
+  qualquer push na branch main
+  → Render faz build da imagem Docker
+  → sobe o novo container automaticamente
+Isso e CI/CD basico — sem precisar apertar
+nada depois do git push.
+URL final:
+aula08-projeto-final.onrender.com</a:t>
+            </a:r>
+          </a:p>
+        </p:txBody>
+      </p:sp>
+    </p:spTree>
+  </p:cSld>
+  <p:clrMapOvr>
+    <a:masterClrMapping/>
+  </p:clrMapOvr>
+</p:sld>
+</file>
+
+<file path=ppt/slides/slide9.xml><?xml version="1.0" encoding="utf-8"?>
+<p:sld xmlns:a="http://schemas.openxmlformats.org/drawingml/2006/main" xmlns:p="http://schemas.openxmlformats.org/presentationml/2006/main" xmlns:r="http://schemas.openxmlformats.org/officeDocument/2006/relationships">
+  <p:cSld>
+    <p:bg>
+      <p:bgPr>
+        <a:solidFill>
+          <a:srgbClr val="0D1B2A"/>
+        </a:solidFill>
+        <a:effectLst/>
+      </p:bgPr>
+    </p:bg>
+    <p:spTree>
+      <p:nvGrpSpPr>
+        <p:cNvPr id="1" name=""/>
+        <p:cNvGrpSpPr/>
+        <p:nvPr/>
+      </p:nvGrpSpPr>
+      <p:grpSpPr/>
+      <p:sp>
+        <p:nvSpPr>
+          <p:cNvPr id="2" name="Rectangle 1"/>
           <p:cNvSpPr/>
           <p:nvPr/>
         </p:nvSpPr>
         <p:spPr>
           <a:xfrm>
-            <a:off x="365760" y="1755648"/>
-            <a:ext cx="11338560" cy="594360"/>
+            <a:off x="0" y="201168"/>
+            <a:ext cx="12188952" cy="54864"/>
+          </a:xfrm>
+          <a:prstGeom prst="rect">
+            <a:avLst/>
+          </a:prstGeom>
+          <a:solidFill>
+            <a:srgbClr val="00B4D8"/>
+          </a:solidFill>
+          <a:ln>
+            <a:noFill/>
+          </a:ln>
+        </p:spPr>
+        <p:style>
+          <a:lnRef idx="1">
+            <a:schemeClr val="accent1"/>
+          </a:lnRef>
+          <a:fillRef idx="3">
+            <a:schemeClr val="accent1"/>
+          </a:fillRef>
+          <a:effectRef idx="2">
+            <a:schemeClr val="accent1"/>
+          </a:effectRef>
+          <a:fontRef idx="minor">
+            <a:schemeClr val="lt1"/>
+          </a:fontRef>
+        </p:style>
+        <p:txBody>
+          <a:bodyPr rtlCol="0" anchor="ctr"/>
+          <a:lstStyle/>
+          <a:p>
+            <a:pPr algn="ctr"/>
+          </a:p>
+        </p:txBody>
+      </p:sp>
+      <p:sp>
+        <p:nvSpPr>
+          <p:cNvPr id="3" name="TextBox 2"/>
+          <p:cNvSpPr txBox="1"/>
+          <p:nvPr/>
+        </p:nvSpPr>
+        <p:spPr>
+          <a:xfrm>
+            <a:off x="457200" y="365760"/>
+            <a:ext cx="10972800" cy="502920"/>
+          </a:xfrm>
+          <a:prstGeom prst="rect">
+            <a:avLst/>
+          </a:prstGeom>
+          <a:noFill/>
+        </p:spPr>
+        <p:txBody>
+          <a:bodyPr wrap="square">
+            <a:spAutoFit/>
+          </a:bodyPr>
+          <a:lstStyle/>
+          <a:p>
+            <a:pPr algn="l"/>
+            <a:r>
+              <a:rPr sz="3000" b="1">
+                <a:solidFill>
+                  <a:srgbClr val="00B4D8"/>
+                </a:solidFill>
+              </a:rPr>
+              <a:t>Resultado Final — tudo funcionando</a:t>
+            </a:r>
+          </a:p>
+        </p:txBody>
+      </p:sp>
+      <p:sp>
+        <p:nvSpPr>
+          <p:cNvPr id="4" name="Rectangle 3"/>
+          <p:cNvSpPr/>
+          <p:nvPr/>
+        </p:nvSpPr>
+        <p:spPr>
+          <a:xfrm>
+            <a:off x="365760" y="1005840"/>
+            <a:ext cx="11475720" cy="1024128"/>
           </a:xfrm>
           <a:prstGeom prst="rect">
             <a:avLst/>
@@ -6730,35 +7716,562 @@
           <a:lstStyle/>
           <a:p>
             <a:pPr algn="ctr"/>
+          </a:p>
+        </p:txBody>
+      </p:sp>
+      <p:sp>
+        <p:nvSpPr>
+          <p:cNvPr id="5" name="TextBox 4"/>
+          <p:cNvSpPr txBox="1"/>
+          <p:nvPr/>
+        </p:nvSpPr>
+        <p:spPr>
+          <a:xfrm>
+            <a:off x="548640" y="1051560"/>
+            <a:ext cx="2743200" cy="411480"/>
+          </a:xfrm>
+          <a:prstGeom prst="rect">
+            <a:avLst/>
+          </a:prstGeom>
+          <a:noFill/>
+        </p:spPr>
+        <p:txBody>
+          <a:bodyPr wrap="square">
+            <a:spAutoFit/>
+          </a:bodyPr>
+          <a:lstStyle/>
+          <a:p>
+            <a:pPr algn="l"/>
             <a:r>
               <a:rPr sz="1400" b="1">
                 <a:solidFill>
                   <a:srgbClr val="2ECC71"/>
                 </a:solidFill>
               </a:rPr>
-              <a:t>  Supabase   </a:t>
-            </a:r>
-            <a:r>
-              <a:rPr sz="1300">
+              <a:t>GitHub + DagsHub</a:t>
+            </a:r>
+          </a:p>
+        </p:txBody>
+      </p:sp>
+      <p:sp>
+        <p:nvSpPr>
+          <p:cNvPr id="6" name="TextBox 5"/>
+          <p:cNvSpPr txBox="1"/>
+          <p:nvPr/>
+        </p:nvSpPr>
+        <p:spPr>
+          <a:xfrm>
+            <a:off x="548640" y="1481328"/>
+            <a:ext cx="6858000" cy="475488"/>
+          </a:xfrm>
+          <a:prstGeom prst="rect">
+            <a:avLst/>
+          </a:prstGeom>
+          <a:noFill/>
+        </p:spPr>
+        <p:txBody>
+          <a:bodyPr wrap="square">
+            <a:spAutoFit/>
+          </a:bodyPr>
+          <a:lstStyle/>
+          <a:p>
+            <a:pPr algn="l"/>
+            <a:r>
+              <a:rPr sz="1100" b="0">
                 <a:solidFill>
                   <a:srgbClr val="FFFFFF"/>
                 </a:solidFill>
               </a:rPr>
-              <a:t>2.126 registros na tabela fetal_health   |   bespxbjpmvmwvmppxkiw.supabase.co</a:t>
-            </a:r>
-          </a:p>
-        </p:txBody>
-      </p:sp>
-      <p:sp>
-        <p:nvSpPr>
-          <p:cNvPr id="6" name="Rectangle 5"/>
+              <a:t>Todo o codigo com historico de commits. Dados versionados via DVC. Qualquer um pode clonar e rodar  dvc repro  para reproduzir o projeto inteiro.</a:t>
+            </a:r>
+          </a:p>
+        </p:txBody>
+      </p:sp>
+      <p:sp>
+        <p:nvSpPr>
+          <p:cNvPr id="7" name="TextBox 6"/>
+          <p:cNvSpPr txBox="1"/>
+          <p:nvPr/>
+        </p:nvSpPr>
+        <p:spPr>
+          <a:xfrm>
+            <a:off x="7543800" y="1097280"/>
+            <a:ext cx="4160520" cy="822960"/>
+          </a:xfrm>
+          <a:prstGeom prst="rect">
+            <a:avLst/>
+          </a:prstGeom>
+          <a:noFill/>
+        </p:spPr>
+        <p:txBody>
+          <a:bodyPr wrap="square">
+            <a:spAutoFit/>
+          </a:bodyPr>
+          <a:lstStyle/>
+          <a:p>
+            <a:pPr algn="l"/>
+            <a:r>
+              <a:rPr sz="1100" b="0">
+                <a:solidFill>
+                  <a:srgbClr val="AABBCC"/>
+                </a:solidFill>
+              </a:rPr>
+              <a:t>github.com/kevloki/Aula08_Projeto_Final</a:t>
+            </a:r>
+          </a:p>
+        </p:txBody>
+      </p:sp>
+      <p:sp>
+        <p:nvSpPr>
+          <p:cNvPr id="8" name="Rectangle 7"/>
           <p:cNvSpPr/>
           <p:nvPr/>
         </p:nvSpPr>
         <p:spPr>
           <a:xfrm>
-            <a:off x="365760" y="2459736"/>
-            <a:ext cx="11338560" cy="594360"/>
+            <a:off x="365760" y="2121408"/>
+            <a:ext cx="11475720" cy="1024128"/>
+          </a:xfrm>
+          <a:prstGeom prst="rect">
+            <a:avLst/>
+          </a:prstGeom>
+          <a:solidFill>
+            <a:srgbClr val="1A2A3A"/>
+          </a:solidFill>
+          <a:ln>
+            <a:solidFill>
+              <a:srgbClr val="00B4D8"/>
+            </a:solidFill>
+          </a:ln>
+        </p:spPr>
+        <p:style>
+          <a:lnRef idx="1">
+            <a:schemeClr val="accent1"/>
+          </a:lnRef>
+          <a:fillRef idx="3">
+            <a:schemeClr val="accent1"/>
+          </a:fillRef>
+          <a:effectRef idx="2">
+            <a:schemeClr val="accent1"/>
+          </a:effectRef>
+          <a:fontRef idx="minor">
+            <a:schemeClr val="lt1"/>
+          </a:fontRef>
+        </p:style>
+        <p:txBody>
+          <a:bodyPr rtlCol="0" anchor="ctr"/>
+          <a:lstStyle/>
+          <a:p>
+            <a:pPr algn="ctr"/>
+          </a:p>
+        </p:txBody>
+      </p:sp>
+      <p:sp>
+        <p:nvSpPr>
+          <p:cNvPr id="9" name="TextBox 8"/>
+          <p:cNvSpPr txBox="1"/>
+          <p:nvPr/>
+        </p:nvSpPr>
+        <p:spPr>
+          <a:xfrm>
+            <a:off x="548640" y="2167128"/>
+            <a:ext cx="2743200" cy="411480"/>
+          </a:xfrm>
+          <a:prstGeom prst="rect">
+            <a:avLst/>
+          </a:prstGeom>
+          <a:noFill/>
+        </p:spPr>
+        <p:txBody>
+          <a:bodyPr wrap="square">
+            <a:spAutoFit/>
+          </a:bodyPr>
+          <a:lstStyle/>
+          <a:p>
+            <a:pPr algn="l"/>
+            <a:r>
+              <a:rPr sz="1400" b="1">
+                <a:solidFill>
+                  <a:srgbClr val="00B4D8"/>
+                </a:solidFill>
+              </a:rPr>
+              <a:t>Supabase</a:t>
+            </a:r>
+          </a:p>
+        </p:txBody>
+      </p:sp>
+      <p:sp>
+        <p:nvSpPr>
+          <p:cNvPr id="10" name="TextBox 9"/>
+          <p:cNvSpPr txBox="1"/>
+          <p:nvPr/>
+        </p:nvSpPr>
+        <p:spPr>
+          <a:xfrm>
+            <a:off x="548640" y="2596896"/>
+            <a:ext cx="6858000" cy="475488"/>
+          </a:xfrm>
+          <a:prstGeom prst="rect">
+            <a:avLst/>
+          </a:prstGeom>
+          <a:noFill/>
+        </p:spPr>
+        <p:txBody>
+          <a:bodyPr wrap="square">
+            <a:spAutoFit/>
+          </a:bodyPr>
+          <a:lstStyle/>
+          <a:p>
+            <a:pPr algn="l"/>
+            <a:r>
+              <a:rPr sz="1100" b="0">
+                <a:solidFill>
+                  <a:srgbClr val="FFFFFF"/>
+                </a:solidFill>
+              </a:rPr>
+              <a:t>2.126 registros de exames CTG em um banco PostgreSQL real na nuvem. O pipeline busca os dados de la — nao de um arquivo local.</a:t>
+            </a:r>
+          </a:p>
+        </p:txBody>
+      </p:sp>
+      <p:sp>
+        <p:nvSpPr>
+          <p:cNvPr id="11" name="TextBox 10"/>
+          <p:cNvSpPr txBox="1"/>
+          <p:nvPr/>
+        </p:nvSpPr>
+        <p:spPr>
+          <a:xfrm>
+            <a:off x="7543800" y="2212848"/>
+            <a:ext cx="4160520" cy="822960"/>
+          </a:xfrm>
+          <a:prstGeom prst="rect">
+            <a:avLst/>
+          </a:prstGeom>
+          <a:noFill/>
+        </p:spPr>
+        <p:txBody>
+          <a:bodyPr wrap="square">
+            <a:spAutoFit/>
+          </a:bodyPr>
+          <a:lstStyle/>
+          <a:p>
+            <a:pPr algn="l"/>
+            <a:r>
+              <a:rPr sz="1100" b="0">
+                <a:solidFill>
+                  <a:srgbClr val="AABBCC"/>
+                </a:solidFill>
+              </a:rPr>
+              <a:t>bespxbjpmvmwvmppxkiw.supabase.co</a:t>
+            </a:r>
+          </a:p>
+        </p:txBody>
+      </p:sp>
+      <p:sp>
+        <p:nvSpPr>
+          <p:cNvPr id="12" name="Rectangle 11"/>
+          <p:cNvSpPr/>
+          <p:nvPr/>
+        </p:nvSpPr>
+        <p:spPr>
+          <a:xfrm>
+            <a:off x="365760" y="3236976"/>
+            <a:ext cx="11475720" cy="1024128"/>
+          </a:xfrm>
+          <a:prstGeom prst="rect">
+            <a:avLst/>
+          </a:prstGeom>
+          <a:solidFill>
+            <a:srgbClr val="1A2A3A"/>
+          </a:solidFill>
+          <a:ln>
+            <a:solidFill>
+              <a:srgbClr val="F39C12"/>
+            </a:solidFill>
+          </a:ln>
+        </p:spPr>
+        <p:style>
+          <a:lnRef idx="1">
+            <a:schemeClr val="accent1"/>
+          </a:lnRef>
+          <a:fillRef idx="3">
+            <a:schemeClr val="accent1"/>
+          </a:fillRef>
+          <a:effectRef idx="2">
+            <a:schemeClr val="accent1"/>
+          </a:effectRef>
+          <a:fontRef idx="minor">
+            <a:schemeClr val="lt1"/>
+          </a:fontRef>
+        </p:style>
+        <p:txBody>
+          <a:bodyPr rtlCol="0" anchor="ctr"/>
+          <a:lstStyle/>
+          <a:p>
+            <a:pPr algn="ctr"/>
+          </a:p>
+        </p:txBody>
+      </p:sp>
+      <p:sp>
+        <p:nvSpPr>
+          <p:cNvPr id="13" name="TextBox 12"/>
+          <p:cNvSpPr txBox="1"/>
+          <p:nvPr/>
+        </p:nvSpPr>
+        <p:spPr>
+          <a:xfrm>
+            <a:off x="548640" y="3282696"/>
+            <a:ext cx="2743200" cy="411480"/>
+          </a:xfrm>
+          <a:prstGeom prst="rect">
+            <a:avLst/>
+          </a:prstGeom>
+          <a:noFill/>
+        </p:spPr>
+        <p:txBody>
+          <a:bodyPr wrap="square">
+            <a:spAutoFit/>
+          </a:bodyPr>
+          <a:lstStyle/>
+          <a:p>
+            <a:pPr algn="l"/>
+            <a:r>
+              <a:rPr sz="1400" b="1">
+                <a:solidFill>
+                  <a:srgbClr val="F39C12"/>
+                </a:solidFill>
+              </a:rPr>
+              <a:t>MLflow no DagsHub</a:t>
+            </a:r>
+          </a:p>
+        </p:txBody>
+      </p:sp>
+      <p:sp>
+        <p:nvSpPr>
+          <p:cNvPr id="14" name="TextBox 13"/>
+          <p:cNvSpPr txBox="1"/>
+          <p:nvPr/>
+        </p:nvSpPr>
+        <p:spPr>
+          <a:xfrm>
+            <a:off x="548640" y="3712464"/>
+            <a:ext cx="6858000" cy="475488"/>
+          </a:xfrm>
+          <a:prstGeom prst="rect">
+            <a:avLst/>
+          </a:prstGeom>
+          <a:noFill/>
+        </p:spPr>
+        <p:txBody>
+          <a:bodyPr wrap="square">
+            <a:spAutoFit/>
+          </a:bodyPr>
+          <a:lstStyle/>
+          <a:p>
+            <a:pPr algn="l"/>
+            <a:r>
+              <a:rPr sz="1100" b="0">
+                <a:solidFill>
+                  <a:srgbClr val="FFFFFF"/>
+                </a:solidFill>
+              </a:rPr>
+              <a:t>6 runs registrados (2 rodadas de treinamento x 3 modelos). Metricas, parametros, artefatos e o modelo vencedor no Model Registry como versao 1 em Production.</a:t>
+            </a:r>
+          </a:p>
+        </p:txBody>
+      </p:sp>
+      <p:sp>
+        <p:nvSpPr>
+          <p:cNvPr id="15" name="TextBox 14"/>
+          <p:cNvSpPr txBox="1"/>
+          <p:nvPr/>
+        </p:nvSpPr>
+        <p:spPr>
+          <a:xfrm>
+            <a:off x="7543800" y="3328416"/>
+            <a:ext cx="4160520" cy="822960"/>
+          </a:xfrm>
+          <a:prstGeom prst="rect">
+            <a:avLst/>
+          </a:prstGeom>
+          <a:noFill/>
+        </p:spPr>
+        <p:txBody>
+          <a:bodyPr wrap="square">
+            <a:spAutoFit/>
+          </a:bodyPr>
+          <a:lstStyle/>
+          <a:p>
+            <a:pPr algn="l"/>
+            <a:r>
+              <a:rPr sz="1100" b="0">
+                <a:solidFill>
+                  <a:srgbClr val="AABBCC"/>
+                </a:solidFill>
+              </a:rPr>
+              <a:t>dagshub.com/kevloki/my-first-repo.mlflow</a:t>
+            </a:r>
+          </a:p>
+        </p:txBody>
+      </p:sp>
+      <p:sp>
+        <p:nvSpPr>
+          <p:cNvPr id="16" name="Rectangle 15"/>
+          <p:cNvSpPr/>
+          <p:nvPr/>
+        </p:nvSpPr>
+        <p:spPr>
+          <a:xfrm>
+            <a:off x="365760" y="4352544"/>
+            <a:ext cx="11475720" cy="1024128"/>
+          </a:xfrm>
+          <a:prstGeom prst="rect">
+            <a:avLst/>
+          </a:prstGeom>
+          <a:solidFill>
+            <a:srgbClr val="1A2A3A"/>
+          </a:solidFill>
+          <a:ln>
+            <a:solidFill>
+              <a:srgbClr val="E74C3C"/>
+            </a:solidFill>
+          </a:ln>
+        </p:spPr>
+        <p:style>
+          <a:lnRef idx="1">
+            <a:schemeClr val="accent1"/>
+          </a:lnRef>
+          <a:fillRef idx="3">
+            <a:schemeClr val="accent1"/>
+          </a:fillRef>
+          <a:effectRef idx="2">
+            <a:schemeClr val="accent1"/>
+          </a:effectRef>
+          <a:fontRef idx="minor">
+            <a:schemeClr val="lt1"/>
+          </a:fontRef>
+        </p:style>
+        <p:txBody>
+          <a:bodyPr rtlCol="0" anchor="ctr"/>
+          <a:lstStyle/>
+          <a:p>
+            <a:pPr algn="ctr"/>
+          </a:p>
+        </p:txBody>
+      </p:sp>
+      <p:sp>
+        <p:nvSpPr>
+          <p:cNvPr id="17" name="TextBox 16"/>
+          <p:cNvSpPr txBox="1"/>
+          <p:nvPr/>
+        </p:nvSpPr>
+        <p:spPr>
+          <a:xfrm>
+            <a:off x="548640" y="4398264"/>
+            <a:ext cx="2743200" cy="411480"/>
+          </a:xfrm>
+          <a:prstGeom prst="rect">
+            <a:avLst/>
+          </a:prstGeom>
+          <a:noFill/>
+        </p:spPr>
+        <p:txBody>
+          <a:bodyPr wrap="square">
+            <a:spAutoFit/>
+          </a:bodyPr>
+          <a:lstStyle/>
+          <a:p>
+            <a:pPr algn="l"/>
+            <a:r>
+              <a:rPr sz="1400" b="1">
+                <a:solidFill>
+                  <a:srgbClr val="E74C3C"/>
+                </a:solidFill>
+              </a:rPr>
+              <a:t>Docker</a:t>
+            </a:r>
+          </a:p>
+        </p:txBody>
+      </p:sp>
+      <p:sp>
+        <p:nvSpPr>
+          <p:cNvPr id="18" name="TextBox 17"/>
+          <p:cNvSpPr txBox="1"/>
+          <p:nvPr/>
+        </p:nvSpPr>
+        <p:spPr>
+          <a:xfrm>
+            <a:off x="548640" y="4828031"/>
+            <a:ext cx="6858000" cy="475488"/>
+          </a:xfrm>
+          <a:prstGeom prst="rect">
+            <a:avLst/>
+          </a:prstGeom>
+          <a:noFill/>
+        </p:spPr>
+        <p:txBody>
+          <a:bodyPr wrap="square">
+            <a:spAutoFit/>
+          </a:bodyPr>
+          <a:lstStyle/>
+          <a:p>
+            <a:pPr algn="l"/>
+            <a:r>
+              <a:rPr sz="1100" b="0">
+                <a:solidFill>
+                  <a:srgbClr val="FFFFFF"/>
+                </a:solidFill>
+              </a:rPr>
+              <a:t>Imagem de 2.16 GB testada localmente. O app sobe em qualquer maquina com Docker instalado — sem instalar Python, sem configurar ambiente.</a:t>
+            </a:r>
+          </a:p>
+        </p:txBody>
+      </p:sp>
+      <p:sp>
+        <p:nvSpPr>
+          <p:cNvPr id="19" name="TextBox 18"/>
+          <p:cNvSpPr txBox="1"/>
+          <p:nvPr/>
+        </p:nvSpPr>
+        <p:spPr>
+          <a:xfrm>
+            <a:off x="7543800" y="4443983"/>
+            <a:ext cx="4160520" cy="822960"/>
+          </a:xfrm>
+          <a:prstGeom prst="rect">
+            <a:avLst/>
+          </a:prstGeom>
+          <a:noFill/>
+        </p:spPr>
+        <p:txBody>
+          <a:bodyPr wrap="square">
+            <a:spAutoFit/>
+          </a:bodyPr>
+          <a:lstStyle/>
+          <a:p>
+            <a:pPr algn="l"/>
+            <a:r>
+              <a:rPr sz="1100" b="0">
+                <a:solidFill>
+                  <a:srgbClr val="AABBCC"/>
+                </a:solidFill>
+              </a:rPr>
+              <a:t>docker run -p 8501:8501 --env-file .env fetal-health-app</a:t>
+            </a:r>
+          </a:p>
+        </p:txBody>
+      </p:sp>
+      <p:sp>
+        <p:nvSpPr>
+          <p:cNvPr id="20" name="Rectangle 19"/>
+          <p:cNvSpPr/>
+          <p:nvPr/>
+        </p:nvSpPr>
+        <p:spPr>
+          <a:xfrm>
+            <a:off x="365760" y="5468112"/>
+            <a:ext cx="11475720" cy="1024128"/>
           </a:xfrm>
           <a:prstGeom prst="rect">
             <a:avLst/>
@@ -6791,265 +8304,107 @@
           <a:lstStyle/>
           <a:p>
             <a:pPr algn="ctr"/>
+          </a:p>
+        </p:txBody>
+      </p:sp>
+      <p:sp>
+        <p:nvSpPr>
+          <p:cNvPr id="21" name="TextBox 20"/>
+          <p:cNvSpPr txBox="1"/>
+          <p:nvPr/>
+        </p:nvSpPr>
+        <p:spPr>
+          <a:xfrm>
+            <a:off x="548640" y="5513832"/>
+            <a:ext cx="2743200" cy="411480"/>
+          </a:xfrm>
+          <a:prstGeom prst="rect">
+            <a:avLst/>
+          </a:prstGeom>
+          <a:noFill/>
+        </p:spPr>
+        <p:txBody>
+          <a:bodyPr wrap="square">
+            <a:spAutoFit/>
+          </a:bodyPr>
+          <a:lstStyle/>
+          <a:p>
+            <a:pPr algn="l"/>
             <a:r>
               <a:rPr sz="1400" b="1">
                 <a:solidFill>
                   <a:srgbClr val="2ECC71"/>
                 </a:solidFill>
               </a:rPr>
-              <a:t>  DVC + DagsHub   </a:t>
-            </a:r>
-            <a:r>
-              <a:rPr sz="1300">
+              <a:t>Render + Streamlit — APP PUBLICA</a:t>
+            </a:r>
+          </a:p>
+        </p:txBody>
+      </p:sp>
+      <p:sp>
+        <p:nvSpPr>
+          <p:cNvPr id="22" name="TextBox 21"/>
+          <p:cNvSpPr txBox="1"/>
+          <p:nvPr/>
+        </p:nvSpPr>
+        <p:spPr>
+          <a:xfrm>
+            <a:off x="548640" y="5943600"/>
+            <a:ext cx="6858000" cy="475488"/>
+          </a:xfrm>
+          <a:prstGeom prst="rect">
+            <a:avLst/>
+          </a:prstGeom>
+          <a:noFill/>
+        </p:spPr>
+        <p:txBody>
+          <a:bodyPr wrap="square">
+            <a:spAutoFit/>
+          </a:bodyPr>
+          <a:lstStyle/>
+          <a:p>
+            <a:pPr algn="l"/>
+            <a:r>
+              <a:rPr sz="1100" b="0">
                 <a:solidFill>
                   <a:srgbClr val="FFFFFF"/>
                 </a:solidFill>
               </a:rPr>
-              <a:t>Dados versionados, pipeline reproduzivel   |   dagshub.com/kevloki/my-first-repo</a:t>
-            </a:r>
-          </a:p>
-        </p:txBody>
-      </p:sp>
-      <p:sp>
-        <p:nvSpPr>
-          <p:cNvPr id="7" name="Rectangle 6"/>
-          <p:cNvSpPr/>
-          <p:nvPr/>
-        </p:nvSpPr>
-        <p:spPr>
-          <a:xfrm>
-            <a:off x="365760" y="3163824"/>
-            <a:ext cx="11338560" cy="594360"/>
-          </a:xfrm>
-          <a:prstGeom prst="rect">
-            <a:avLst/>
-          </a:prstGeom>
-          <a:solidFill>
-            <a:srgbClr val="1A2A3A"/>
-          </a:solidFill>
-          <a:ln>
-            <a:solidFill>
-              <a:srgbClr val="2ECC71"/>
-            </a:solidFill>
-          </a:ln>
-        </p:spPr>
-        <p:style>
-          <a:lnRef idx="1">
-            <a:schemeClr val="accent1"/>
-          </a:lnRef>
-          <a:fillRef idx="3">
-            <a:schemeClr val="accent1"/>
-          </a:fillRef>
-          <a:effectRef idx="2">
-            <a:schemeClr val="accent1"/>
-          </a:effectRef>
-          <a:fontRef idx="minor">
-            <a:schemeClr val="lt1"/>
-          </a:fontRef>
-        </p:style>
-        <p:txBody>
-          <a:bodyPr rtlCol="0" anchor="ctr"/>
-          <a:lstStyle/>
-          <a:p>
-            <a:pPr algn="ctr"/>
-            <a:r>
-              <a:rPr sz="1400" b="1">
-                <a:solidFill>
-                  <a:srgbClr val="2ECC71"/>
-                </a:solidFill>
-              </a:rPr>
-              <a:t>  MLflow   </a:t>
-            </a:r>
-            <a:r>
-              <a:rPr sz="1300">
-                <a:solidFill>
-                  <a:srgbClr val="FFFFFF"/>
-                </a:solidFill>
-              </a:rPr>
-              <a:t>3 modelos, metricas, Model Registry   |   dagshub.com/kevloki/my-first-repo.mlflow</a:t>
-            </a:r>
-          </a:p>
-        </p:txBody>
-      </p:sp>
-      <p:sp>
-        <p:nvSpPr>
-          <p:cNvPr id="8" name="Rectangle 7"/>
-          <p:cNvSpPr/>
-          <p:nvPr/>
-        </p:nvSpPr>
-        <p:spPr>
-          <a:xfrm>
-            <a:off x="365760" y="3867912"/>
-            <a:ext cx="11338560" cy="594360"/>
-          </a:xfrm>
-          <a:prstGeom prst="rect">
-            <a:avLst/>
-          </a:prstGeom>
-          <a:solidFill>
-            <a:srgbClr val="1A2A3A"/>
-          </a:solidFill>
-          <a:ln>
-            <a:solidFill>
-              <a:srgbClr val="2ECC71"/>
-            </a:solidFill>
-          </a:ln>
-        </p:spPr>
-        <p:style>
-          <a:lnRef idx="1">
-            <a:schemeClr val="accent1"/>
-          </a:lnRef>
-          <a:fillRef idx="3">
-            <a:schemeClr val="accent1"/>
-          </a:fillRef>
-          <a:effectRef idx="2">
-            <a:schemeClr val="accent1"/>
-          </a:effectRef>
-          <a:fontRef idx="minor">
-            <a:schemeClr val="lt1"/>
-          </a:fontRef>
-        </p:style>
-        <p:txBody>
-          <a:bodyPr rtlCol="0" anchor="ctr"/>
-          <a:lstStyle/>
-          <a:p>
-            <a:pPr algn="ctr"/>
-            <a:r>
-              <a:rPr sz="1400" b="1">
-                <a:solidFill>
-                  <a:srgbClr val="2ECC71"/>
-                </a:solidFill>
-              </a:rPr>
-              <a:t>  Docker   </a:t>
-            </a:r>
-            <a:r>
-              <a:rPr sz="1300">
-                <a:solidFill>
-                  <a:srgbClr val="FFFFFF"/>
-                </a:solidFill>
-              </a:rPr>
-              <a:t>Imagem testada localmente   |   fetal-health-app:latest  (2.16 GB)</a:t>
-            </a:r>
-          </a:p>
-        </p:txBody>
-      </p:sp>
-      <p:sp>
-        <p:nvSpPr>
-          <p:cNvPr id="9" name="Rectangle 8"/>
-          <p:cNvSpPr/>
-          <p:nvPr/>
-        </p:nvSpPr>
-        <p:spPr>
-          <a:xfrm>
-            <a:off x="365760" y="4572000"/>
-            <a:ext cx="11338560" cy="594360"/>
-          </a:xfrm>
-          <a:prstGeom prst="rect">
-            <a:avLst/>
-          </a:prstGeom>
-          <a:solidFill>
-            <a:srgbClr val="1A2A3A"/>
-          </a:solidFill>
-          <a:ln>
-            <a:solidFill>
-              <a:srgbClr val="2ECC71"/>
-            </a:solidFill>
-          </a:ln>
-        </p:spPr>
-        <p:style>
-          <a:lnRef idx="1">
-            <a:schemeClr val="accent1"/>
-          </a:lnRef>
-          <a:fillRef idx="3">
-            <a:schemeClr val="accent1"/>
-          </a:fillRef>
-          <a:effectRef idx="2">
-            <a:schemeClr val="accent1"/>
-          </a:effectRef>
-          <a:fontRef idx="minor">
-            <a:schemeClr val="lt1"/>
-          </a:fontRef>
-        </p:style>
-        <p:txBody>
-          <a:bodyPr rtlCol="0" anchor="ctr"/>
-          <a:lstStyle/>
-          <a:p>
-            <a:pPr algn="ctr"/>
-            <a:r>
-              <a:rPr sz="1400" b="1">
-                <a:solidFill>
-                  <a:srgbClr val="2ECC71"/>
-                </a:solidFill>
-              </a:rPr>
-              <a:t>  Render + Streamlit   </a:t>
-            </a:r>
-            <a:r>
-              <a:rPr sz="1300">
-                <a:solidFill>
-                  <a:srgbClr val="FFFFFF"/>
-                </a:solidFill>
-              </a:rPr>
-              <a:t>App publica e funcionando   |   aula08-projeto-final.onrender.com</a:t>
-            </a:r>
-          </a:p>
-        </p:txBody>
-      </p:sp>
-      <p:sp>
-        <p:nvSpPr>
-          <p:cNvPr id="10" name="Rectangle 9"/>
-          <p:cNvSpPr/>
-          <p:nvPr/>
-        </p:nvSpPr>
-        <p:spPr>
-          <a:xfrm>
-            <a:off x="365760" y="5276088"/>
-            <a:ext cx="11338560" cy="594360"/>
-          </a:xfrm>
-          <a:prstGeom prst="rect">
-            <a:avLst/>
-          </a:prstGeom>
-          <a:solidFill>
-            <a:srgbClr val="1A2A3A"/>
-          </a:solidFill>
-          <a:ln>
-            <a:solidFill>
-              <a:srgbClr val="2ECC71"/>
-            </a:solidFill>
-          </a:ln>
-        </p:spPr>
-        <p:style>
-          <a:lnRef idx="1">
-            <a:schemeClr val="accent1"/>
-          </a:lnRef>
-          <a:fillRef idx="3">
-            <a:schemeClr val="accent1"/>
-          </a:fillRef>
-          <a:effectRef idx="2">
-            <a:schemeClr val="accent1"/>
-          </a:effectRef>
-          <a:fontRef idx="minor">
-            <a:schemeClr val="lt1"/>
-          </a:fontRef>
-        </p:style>
-        <p:txBody>
-          <a:bodyPr rtlCol="0" anchor="ctr"/>
-          <a:lstStyle/>
-          <a:p>
-            <a:pPr algn="ctr"/>
-            <a:r>
-              <a:rPr sz="1400" b="1">
-                <a:solidFill>
-                  <a:srgbClr val="2ECC71"/>
-                </a:solidFill>
-              </a:rPr>
-              <a:t>  Notebook EDA   </a:t>
-            </a:r>
-            <a:r>
-              <a:rPr sz="1300">
-                <a:solidFill>
-                  <a:srgbClr val="FFFFFF"/>
-                </a:solidFill>
-              </a:rPr>
-              <a:t>Analise exploratoria completa   |   notebooks/eda.ipynb</a:t>
+              <a:t>O app esta no ar agora. Qualquer pessoa pode acessar, inserir valores de um exame CTG e ver a classificacao com probabilidades.</a:t>
+            </a:r>
+          </a:p>
+        </p:txBody>
+      </p:sp>
+      <p:sp>
+        <p:nvSpPr>
+          <p:cNvPr id="23" name="TextBox 22"/>
+          <p:cNvSpPr txBox="1"/>
+          <p:nvPr/>
+        </p:nvSpPr>
+        <p:spPr>
+          <a:xfrm>
+            <a:off x="7543800" y="5559552"/>
+            <a:ext cx="4160520" cy="822960"/>
+          </a:xfrm>
+          <a:prstGeom prst="rect">
+            <a:avLst/>
+          </a:prstGeom>
+          <a:noFill/>
+        </p:spPr>
+        <p:txBody>
+          <a:bodyPr wrap="square">
+            <a:spAutoFit/>
+          </a:bodyPr>
+          <a:lstStyle/>
+          <a:p>
+            <a:pPr algn="l"/>
+            <a:r>
+              <a:rPr sz="1100" b="0">
+                <a:solidFill>
+                  <a:srgbClr val="AABBCC"/>
+                </a:solidFill>
+              </a:rPr>
+              <a:t>aula08-projeto-final.onrender.com</a:t>
             </a:r>
           </a:p>
         </p:txBody>
